--- a/slides/lezione2.pptx
+++ b/slides/lezione2.pptx
@@ -5,16 +5,29 @@
     <p:sldMasterId id="2147483648" r:id="rId1"/>
   </p:sldMasterIdLst>
   <p:notesMasterIdLst>
-    <p:notesMasterId r:id="rId9"/>
+    <p:notesMasterId r:id="rId22"/>
   </p:notesMasterIdLst>
   <p:sldIdLst>
     <p:sldId id="256" r:id="rId2"/>
     <p:sldId id="257" r:id="rId3"/>
     <p:sldId id="258" r:id="rId4"/>
-    <p:sldId id="259" r:id="rId5"/>
-    <p:sldId id="260" r:id="rId6"/>
+    <p:sldId id="272" r:id="rId5"/>
+    <p:sldId id="259" r:id="rId6"/>
     <p:sldId id="261" r:id="rId7"/>
-    <p:sldId id="262" r:id="rId8"/>
+    <p:sldId id="260" r:id="rId8"/>
+    <p:sldId id="264" r:id="rId9"/>
+    <p:sldId id="263" r:id="rId10"/>
+    <p:sldId id="269" r:id="rId11"/>
+    <p:sldId id="270" r:id="rId12"/>
+    <p:sldId id="274" r:id="rId13"/>
+    <p:sldId id="275" r:id="rId14"/>
+    <p:sldId id="266" r:id="rId15"/>
+    <p:sldId id="262" r:id="rId16"/>
+    <p:sldId id="267" r:id="rId17"/>
+    <p:sldId id="268" r:id="rId18"/>
+    <p:sldId id="271" r:id="rId19"/>
+    <p:sldId id="273" r:id="rId20"/>
+    <p:sldId id="265" r:id="rId21"/>
   </p:sldIdLst>
   <p:sldSz cx="12192000" cy="6858000"/>
   <p:notesSz cx="6858000" cy="9144000"/>
@@ -203,7 +216,7 @@
           <a:p>
             <a:fld id="{E39E4411-F617-6844-B543-1D0C1529BD09}" type="datetimeFigureOut">
               <a:rPr lang="en-US" smtClean="0"/>
-              <a:t>12/19/25</a:t>
+              <a:t>1/8/26</a:t>
             </a:fld>
             <a:endParaRPr lang="en-US"/>
           </a:p>
@@ -3739,6 +3752,18 @@
               <a:rPr lang="it-IT" noProof="0" dirty="0"/>
               <a:t>Lezione 2</a:t>
             </a:r>
+            <a:br>
+              <a:rPr lang="it-IT" noProof="0" dirty="0"/>
+            </a:br>
+            <a:r>
+              <a:rPr lang="it-IT" noProof="0" dirty="0"/>
+              <a:t>Spice </a:t>
+            </a:r>
+            <a:r>
+              <a:rPr lang="it-IT" noProof="0" dirty="0" err="1"/>
+              <a:t>simulation</a:t>
+            </a:r>
+            <a:endParaRPr lang="it-IT" noProof="0" dirty="0"/>
           </a:p>
         </p:txBody>
       </p:sp>
@@ -3866,6 +3891,1805 @@
     <p:extLst>
       <p:ext uri="{BB962C8B-B14F-4D97-AF65-F5344CB8AC3E}">
         <p14:creationId xmlns:p14="http://schemas.microsoft.com/office/powerpoint/2010/main" val="487565242"/>
+      </p:ext>
+    </p:extLst>
+  </p:cSld>
+  <p:clrMapOvr>
+    <a:masterClrMapping/>
+  </p:clrMapOvr>
+</p:sld>
+</file>
+
+<file path=ppt/slides/slide10.xml><?xml version="1.0" encoding="utf-8"?>
+<p:sld xmlns:a="http://schemas.openxmlformats.org/drawingml/2006/main" xmlns:r="http://schemas.openxmlformats.org/officeDocument/2006/relationships" xmlns:p="http://schemas.openxmlformats.org/presentationml/2006/main">
+  <p:cSld>
+    <p:spTree>
+      <p:nvGrpSpPr>
+        <p:cNvPr id="1" name=""/>
+        <p:cNvGrpSpPr/>
+        <p:nvPr/>
+      </p:nvGrpSpPr>
+      <p:grpSpPr>
+        <a:xfrm>
+          <a:off x="0" y="0"/>
+          <a:ext cx="0" cy="0"/>
+          <a:chOff x="0" y="0"/>
+          <a:chExt cx="0" cy="0"/>
+        </a:xfrm>
+      </p:grpSpPr>
+      <p:sp>
+        <p:nvSpPr>
+          <p:cNvPr id="2" name="Title 1">
+            <a:extLst>
+              <a:ext uri="{FF2B5EF4-FFF2-40B4-BE49-F238E27FC236}">
+                <a16:creationId xmlns:a16="http://schemas.microsoft.com/office/drawing/2014/main" id="{D96C57CD-AC6B-8B38-F620-6A3833C1BD05}"/>
+              </a:ext>
+            </a:extLst>
+          </p:cNvPr>
+          <p:cNvSpPr>
+            <a:spLocks noGrp="1"/>
+          </p:cNvSpPr>
+          <p:nvPr>
+            <p:ph type="title"/>
+          </p:nvPr>
+        </p:nvSpPr>
+        <p:spPr/>
+        <p:txBody>
+          <a:bodyPr/>
+          <a:lstStyle/>
+          <a:p>
+            <a:r>
+              <a:rPr lang="en-US" dirty="0"/>
+              <a:t>Simulation: AC (.ac) - 1</a:t>
+            </a:r>
+          </a:p>
+        </p:txBody>
+      </p:sp>
+      <p:sp>
+        <p:nvSpPr>
+          <p:cNvPr id="3" name="Date Placeholder 2">
+            <a:extLst>
+              <a:ext uri="{FF2B5EF4-FFF2-40B4-BE49-F238E27FC236}">
+                <a16:creationId xmlns:a16="http://schemas.microsoft.com/office/drawing/2014/main" id="{574482B2-4527-57F1-3423-B89D654D15C5}"/>
+              </a:ext>
+            </a:extLst>
+          </p:cNvPr>
+          <p:cNvSpPr>
+            <a:spLocks noGrp="1"/>
+          </p:cNvSpPr>
+          <p:nvPr>
+            <p:ph type="dt" sz="half" idx="10"/>
+          </p:nvPr>
+        </p:nvSpPr>
+        <p:spPr/>
+        <p:txBody>
+          <a:bodyPr/>
+          <a:lstStyle/>
+          <a:p>
+            <a:r>
+              <a:rPr lang="en-US"/>
+              <a:t>15/01/2026</a:t>
+            </a:r>
+          </a:p>
+        </p:txBody>
+      </p:sp>
+      <p:sp>
+        <p:nvSpPr>
+          <p:cNvPr id="4" name="Footer Placeholder 3">
+            <a:extLst>
+              <a:ext uri="{FF2B5EF4-FFF2-40B4-BE49-F238E27FC236}">
+                <a16:creationId xmlns:a16="http://schemas.microsoft.com/office/drawing/2014/main" id="{FBFAF6EC-9E9B-7CA8-495B-A2BE0D1CBD2B}"/>
+              </a:ext>
+            </a:extLst>
+          </p:cNvPr>
+          <p:cNvSpPr>
+            <a:spLocks noGrp="1"/>
+          </p:cNvSpPr>
+          <p:nvPr>
+            <p:ph type="ftr" sz="quarter" idx="11"/>
+          </p:nvPr>
+        </p:nvSpPr>
+        <p:spPr/>
+        <p:txBody>
+          <a:bodyPr/>
+          <a:lstStyle/>
+          <a:p>
+            <a:r>
+              <a:rPr lang="en-US"/>
+              <a:t>Stefan Cristi Zugravel, elettronica base, TPS lezione 2</a:t>
+            </a:r>
+          </a:p>
+        </p:txBody>
+      </p:sp>
+      <p:sp>
+        <p:nvSpPr>
+          <p:cNvPr id="5" name="Slide Number Placeholder 4">
+            <a:extLst>
+              <a:ext uri="{FF2B5EF4-FFF2-40B4-BE49-F238E27FC236}">
+                <a16:creationId xmlns:a16="http://schemas.microsoft.com/office/drawing/2014/main" id="{84E021BA-37AA-AA0F-D704-F7B20B30AA83}"/>
+              </a:ext>
+            </a:extLst>
+          </p:cNvPr>
+          <p:cNvSpPr>
+            <a:spLocks noGrp="1"/>
+          </p:cNvSpPr>
+          <p:nvPr>
+            <p:ph type="sldNum" sz="quarter" idx="12"/>
+          </p:nvPr>
+        </p:nvSpPr>
+        <p:spPr/>
+        <p:txBody>
+          <a:bodyPr/>
+          <a:lstStyle/>
+          <a:p>
+            <a:fld id="{B7C12E76-5DE4-834B-BE10-AD31AA7B20EC}" type="slidenum">
+              <a:rPr lang="en-US" smtClean="0"/>
+              <a:t>10</a:t>
+            </a:fld>
+            <a:endParaRPr lang="en-US"/>
+          </a:p>
+        </p:txBody>
+      </p:sp>
+      <p:pic>
+        <p:nvPicPr>
+          <p:cNvPr id="6" name="Picture 5">
+            <a:extLst>
+              <a:ext uri="{FF2B5EF4-FFF2-40B4-BE49-F238E27FC236}">
+                <a16:creationId xmlns:a16="http://schemas.microsoft.com/office/drawing/2014/main" id="{CC44522C-E7B2-62FE-4B98-5DA593C5F9D4}"/>
+              </a:ext>
+            </a:extLst>
+          </p:cNvPr>
+          <p:cNvPicPr>
+            <a:picLocks noChangeAspect="1"/>
+          </p:cNvPicPr>
+          <p:nvPr/>
+        </p:nvPicPr>
+        <p:blipFill>
+          <a:blip r:embed="rId2"/>
+          <a:stretch>
+            <a:fillRect/>
+          </a:stretch>
+        </p:blipFill>
+        <p:spPr>
+          <a:xfrm>
+            <a:off x="1480873" y="1559858"/>
+            <a:ext cx="8869488" cy="4603249"/>
+          </a:xfrm>
+          <a:prstGeom prst="rect">
+            <a:avLst/>
+          </a:prstGeom>
+        </p:spPr>
+      </p:pic>
+      <p:sp>
+        <p:nvSpPr>
+          <p:cNvPr id="8" name="TextBox 7">
+            <a:extLst>
+              <a:ext uri="{FF2B5EF4-FFF2-40B4-BE49-F238E27FC236}">
+                <a16:creationId xmlns:a16="http://schemas.microsoft.com/office/drawing/2014/main" id="{6B13EEB6-4B3D-F49F-7509-603C20AC956B}"/>
+              </a:ext>
+            </a:extLst>
+          </p:cNvPr>
+          <p:cNvSpPr txBox="1"/>
+          <p:nvPr/>
+        </p:nvSpPr>
+        <p:spPr>
+          <a:xfrm>
+            <a:off x="1156447" y="1133539"/>
+            <a:ext cx="6113928" cy="830997"/>
+          </a:xfrm>
+          <a:prstGeom prst="rect">
+            <a:avLst/>
+          </a:prstGeom>
+          <a:solidFill>
+            <a:schemeClr val="bg1"/>
+          </a:solidFill>
+        </p:spPr>
+        <p:txBody>
+          <a:bodyPr wrap="square">
+            <a:spAutoFit/>
+          </a:bodyPr>
+          <a:lstStyle/>
+          <a:p>
+            <a:r>
+              <a:rPr lang="en-US" sz="2400" dirty="0"/>
+              <a:t>AC simulation gives </a:t>
+            </a:r>
+            <a:r>
+              <a:rPr lang="en-US" sz="2400" b="1" dirty="0"/>
+              <a:t>Voltage and/or Current </a:t>
+            </a:r>
+            <a:r>
+              <a:rPr lang="en-US" sz="2400" b="1" dirty="0" err="1"/>
+              <a:t>vs.frequency</a:t>
+            </a:r>
+            <a:r>
+              <a:rPr lang="en-US" sz="2400" dirty="0"/>
+              <a:t>.</a:t>
+            </a:r>
+          </a:p>
+        </p:txBody>
+      </p:sp>
+      <p:sp>
+        <p:nvSpPr>
+          <p:cNvPr id="10" name="TextBox 9">
+            <a:extLst>
+              <a:ext uri="{FF2B5EF4-FFF2-40B4-BE49-F238E27FC236}">
+                <a16:creationId xmlns:a16="http://schemas.microsoft.com/office/drawing/2014/main" id="{F57D795E-B3B7-601C-29C1-FFAA74488650}"/>
+              </a:ext>
+            </a:extLst>
+          </p:cNvPr>
+          <p:cNvSpPr txBox="1"/>
+          <p:nvPr/>
+        </p:nvSpPr>
+        <p:spPr>
+          <a:xfrm>
+            <a:off x="4840939" y="337764"/>
+            <a:ext cx="6929720" cy="646331"/>
+          </a:xfrm>
+          <a:prstGeom prst="rect">
+            <a:avLst/>
+          </a:prstGeom>
+          <a:noFill/>
+        </p:spPr>
+        <p:txBody>
+          <a:bodyPr wrap="square">
+            <a:spAutoFit/>
+          </a:bodyPr>
+          <a:lstStyle/>
+          <a:p>
+            <a:r>
+              <a:rPr lang="en-US" dirty="0"/>
+              <a:t>“The small signal analysis results are plotted in the waveform viewer as magnitude and phase over frequency.”</a:t>
+            </a:r>
+          </a:p>
+        </p:txBody>
+      </p:sp>
+    </p:spTree>
+    <p:extLst>
+      <p:ext uri="{BB962C8B-B14F-4D97-AF65-F5344CB8AC3E}">
+        <p14:creationId xmlns:p14="http://schemas.microsoft.com/office/powerpoint/2010/main" val="3241668025"/>
+      </p:ext>
+    </p:extLst>
+  </p:cSld>
+  <p:clrMapOvr>
+    <a:masterClrMapping/>
+  </p:clrMapOvr>
+</p:sld>
+</file>
+
+<file path=ppt/slides/slide11.xml><?xml version="1.0" encoding="utf-8"?>
+<p:sld xmlns:a="http://schemas.openxmlformats.org/drawingml/2006/main" xmlns:r="http://schemas.openxmlformats.org/officeDocument/2006/relationships" xmlns:p="http://schemas.openxmlformats.org/presentationml/2006/main">
+  <p:cSld>
+    <p:spTree>
+      <p:nvGrpSpPr>
+        <p:cNvPr id="1" name=""/>
+        <p:cNvGrpSpPr/>
+        <p:nvPr/>
+      </p:nvGrpSpPr>
+      <p:grpSpPr>
+        <a:xfrm>
+          <a:off x="0" y="0"/>
+          <a:ext cx="0" cy="0"/>
+          <a:chOff x="0" y="0"/>
+          <a:chExt cx="0" cy="0"/>
+        </a:xfrm>
+      </p:grpSpPr>
+      <p:sp>
+        <p:nvSpPr>
+          <p:cNvPr id="2" name="Title 1">
+            <a:extLst>
+              <a:ext uri="{FF2B5EF4-FFF2-40B4-BE49-F238E27FC236}">
+                <a16:creationId xmlns:a16="http://schemas.microsoft.com/office/drawing/2014/main" id="{6CF06737-0327-CC65-6BED-2944F4C87054}"/>
+              </a:ext>
+            </a:extLst>
+          </p:cNvPr>
+          <p:cNvSpPr>
+            <a:spLocks noGrp="1"/>
+          </p:cNvSpPr>
+          <p:nvPr>
+            <p:ph type="title"/>
+          </p:nvPr>
+        </p:nvSpPr>
+        <p:spPr/>
+        <p:txBody>
+          <a:bodyPr/>
+          <a:lstStyle/>
+          <a:p>
+            <a:r>
+              <a:rPr lang="en-US" dirty="0"/>
+              <a:t>Simulation: AC (.ac) - 2</a:t>
+            </a:r>
+          </a:p>
+        </p:txBody>
+      </p:sp>
+      <p:sp>
+        <p:nvSpPr>
+          <p:cNvPr id="3" name="Date Placeholder 2">
+            <a:extLst>
+              <a:ext uri="{FF2B5EF4-FFF2-40B4-BE49-F238E27FC236}">
+                <a16:creationId xmlns:a16="http://schemas.microsoft.com/office/drawing/2014/main" id="{677A0445-2A7F-3213-18C6-C8F409C39884}"/>
+              </a:ext>
+            </a:extLst>
+          </p:cNvPr>
+          <p:cNvSpPr>
+            <a:spLocks noGrp="1"/>
+          </p:cNvSpPr>
+          <p:nvPr>
+            <p:ph type="dt" sz="half" idx="10"/>
+          </p:nvPr>
+        </p:nvSpPr>
+        <p:spPr/>
+        <p:txBody>
+          <a:bodyPr/>
+          <a:lstStyle/>
+          <a:p>
+            <a:r>
+              <a:rPr lang="en-US"/>
+              <a:t>15/01/2026</a:t>
+            </a:r>
+          </a:p>
+        </p:txBody>
+      </p:sp>
+      <p:sp>
+        <p:nvSpPr>
+          <p:cNvPr id="4" name="Footer Placeholder 3">
+            <a:extLst>
+              <a:ext uri="{FF2B5EF4-FFF2-40B4-BE49-F238E27FC236}">
+                <a16:creationId xmlns:a16="http://schemas.microsoft.com/office/drawing/2014/main" id="{F75B1208-D639-793F-E98A-793E14ED8273}"/>
+              </a:ext>
+            </a:extLst>
+          </p:cNvPr>
+          <p:cNvSpPr>
+            <a:spLocks noGrp="1"/>
+          </p:cNvSpPr>
+          <p:nvPr>
+            <p:ph type="ftr" sz="quarter" idx="11"/>
+          </p:nvPr>
+        </p:nvSpPr>
+        <p:spPr/>
+        <p:txBody>
+          <a:bodyPr/>
+          <a:lstStyle/>
+          <a:p>
+            <a:r>
+              <a:rPr lang="en-US"/>
+              <a:t>Stefan Cristi Zugravel, elettronica base, TPS lezione 2</a:t>
+            </a:r>
+          </a:p>
+        </p:txBody>
+      </p:sp>
+      <p:sp>
+        <p:nvSpPr>
+          <p:cNvPr id="5" name="Slide Number Placeholder 4">
+            <a:extLst>
+              <a:ext uri="{FF2B5EF4-FFF2-40B4-BE49-F238E27FC236}">
+                <a16:creationId xmlns:a16="http://schemas.microsoft.com/office/drawing/2014/main" id="{F113DA69-D640-990E-C6AF-670F12F286E2}"/>
+              </a:ext>
+            </a:extLst>
+          </p:cNvPr>
+          <p:cNvSpPr>
+            <a:spLocks noGrp="1"/>
+          </p:cNvSpPr>
+          <p:nvPr>
+            <p:ph type="sldNum" sz="quarter" idx="12"/>
+          </p:nvPr>
+        </p:nvSpPr>
+        <p:spPr/>
+        <p:txBody>
+          <a:bodyPr/>
+          <a:lstStyle/>
+          <a:p>
+            <a:fld id="{B7C12E76-5DE4-834B-BE10-AD31AA7B20EC}" type="slidenum">
+              <a:rPr lang="en-US" smtClean="0"/>
+              <a:t>11</a:t>
+            </a:fld>
+            <a:endParaRPr lang="en-US"/>
+          </a:p>
+        </p:txBody>
+      </p:sp>
+      <p:pic>
+        <p:nvPicPr>
+          <p:cNvPr id="6" name="Picture 5">
+            <a:extLst>
+              <a:ext uri="{FF2B5EF4-FFF2-40B4-BE49-F238E27FC236}">
+                <a16:creationId xmlns:a16="http://schemas.microsoft.com/office/drawing/2014/main" id="{6B47F705-0E4C-F7DE-7DF3-67145D70CF71}"/>
+              </a:ext>
+            </a:extLst>
+          </p:cNvPr>
+          <p:cNvPicPr>
+            <a:picLocks noChangeAspect="1"/>
+          </p:cNvPicPr>
+          <p:nvPr/>
+        </p:nvPicPr>
+        <p:blipFill>
+          <a:blip r:embed="rId2"/>
+          <a:stretch>
+            <a:fillRect/>
+          </a:stretch>
+        </p:blipFill>
+        <p:spPr>
+          <a:xfrm>
+            <a:off x="1008018" y="1445626"/>
+            <a:ext cx="10175963" cy="3966748"/>
+          </a:xfrm>
+          <a:prstGeom prst="rect">
+            <a:avLst/>
+          </a:prstGeom>
+        </p:spPr>
+      </p:pic>
+    </p:spTree>
+    <p:extLst>
+      <p:ext uri="{BB962C8B-B14F-4D97-AF65-F5344CB8AC3E}">
+        <p14:creationId xmlns:p14="http://schemas.microsoft.com/office/powerpoint/2010/main" val="498120365"/>
+      </p:ext>
+    </p:extLst>
+  </p:cSld>
+  <p:clrMapOvr>
+    <a:masterClrMapping/>
+  </p:clrMapOvr>
+</p:sld>
+</file>
+
+<file path=ppt/slides/slide12.xml><?xml version="1.0" encoding="utf-8"?>
+<p:sld xmlns:a="http://schemas.openxmlformats.org/drawingml/2006/main" xmlns:r="http://schemas.openxmlformats.org/officeDocument/2006/relationships" xmlns:p="http://schemas.openxmlformats.org/presentationml/2006/main">
+  <p:cSld>
+    <p:spTree>
+      <p:nvGrpSpPr>
+        <p:cNvPr id="1" name=""/>
+        <p:cNvGrpSpPr/>
+        <p:nvPr/>
+      </p:nvGrpSpPr>
+      <p:grpSpPr>
+        <a:xfrm>
+          <a:off x="0" y="0"/>
+          <a:ext cx="0" cy="0"/>
+          <a:chOff x="0" y="0"/>
+          <a:chExt cx="0" cy="0"/>
+        </a:xfrm>
+      </p:grpSpPr>
+      <p:sp>
+        <p:nvSpPr>
+          <p:cNvPr id="2" name="Title 1">
+            <a:extLst>
+              <a:ext uri="{FF2B5EF4-FFF2-40B4-BE49-F238E27FC236}">
+                <a16:creationId xmlns:a16="http://schemas.microsoft.com/office/drawing/2014/main" id="{28625CA9-8107-A114-D095-52687B098EE4}"/>
+              </a:ext>
+            </a:extLst>
+          </p:cNvPr>
+          <p:cNvSpPr>
+            <a:spLocks noGrp="1"/>
+          </p:cNvSpPr>
+          <p:nvPr>
+            <p:ph type="title"/>
+          </p:nvPr>
+        </p:nvSpPr>
+        <p:spPr/>
+        <p:txBody>
+          <a:bodyPr/>
+          <a:lstStyle/>
+          <a:p>
+            <a:r>
+              <a:rPr lang="en-US" dirty="0"/>
+              <a:t>Simulation: AC (.ac) - 3</a:t>
+            </a:r>
+          </a:p>
+        </p:txBody>
+      </p:sp>
+      <p:sp>
+        <p:nvSpPr>
+          <p:cNvPr id="3" name="Date Placeholder 2">
+            <a:extLst>
+              <a:ext uri="{FF2B5EF4-FFF2-40B4-BE49-F238E27FC236}">
+                <a16:creationId xmlns:a16="http://schemas.microsoft.com/office/drawing/2014/main" id="{9E92F995-475C-7CE6-8D47-BA200CE36A3D}"/>
+              </a:ext>
+            </a:extLst>
+          </p:cNvPr>
+          <p:cNvSpPr>
+            <a:spLocks noGrp="1"/>
+          </p:cNvSpPr>
+          <p:nvPr>
+            <p:ph type="dt" sz="half" idx="10"/>
+          </p:nvPr>
+        </p:nvSpPr>
+        <p:spPr/>
+        <p:txBody>
+          <a:bodyPr/>
+          <a:lstStyle/>
+          <a:p>
+            <a:r>
+              <a:rPr lang="en-US"/>
+              <a:t>15/01/2026</a:t>
+            </a:r>
+          </a:p>
+        </p:txBody>
+      </p:sp>
+      <p:sp>
+        <p:nvSpPr>
+          <p:cNvPr id="4" name="Footer Placeholder 3">
+            <a:extLst>
+              <a:ext uri="{FF2B5EF4-FFF2-40B4-BE49-F238E27FC236}">
+                <a16:creationId xmlns:a16="http://schemas.microsoft.com/office/drawing/2014/main" id="{7624C7D5-7D96-7850-B1D3-9C588096F864}"/>
+              </a:ext>
+            </a:extLst>
+          </p:cNvPr>
+          <p:cNvSpPr>
+            <a:spLocks noGrp="1"/>
+          </p:cNvSpPr>
+          <p:nvPr>
+            <p:ph type="ftr" sz="quarter" idx="11"/>
+          </p:nvPr>
+        </p:nvSpPr>
+        <p:spPr/>
+        <p:txBody>
+          <a:bodyPr/>
+          <a:lstStyle/>
+          <a:p>
+            <a:r>
+              <a:rPr lang="en-US"/>
+              <a:t>Stefan Cristi Zugravel, elettronica base, TPS lezione 2</a:t>
+            </a:r>
+          </a:p>
+        </p:txBody>
+      </p:sp>
+      <p:sp>
+        <p:nvSpPr>
+          <p:cNvPr id="5" name="Slide Number Placeholder 4">
+            <a:extLst>
+              <a:ext uri="{FF2B5EF4-FFF2-40B4-BE49-F238E27FC236}">
+                <a16:creationId xmlns:a16="http://schemas.microsoft.com/office/drawing/2014/main" id="{AD6B26E7-5A56-D5BA-8B5D-9DFF27BA7A0A}"/>
+              </a:ext>
+            </a:extLst>
+          </p:cNvPr>
+          <p:cNvSpPr>
+            <a:spLocks noGrp="1"/>
+          </p:cNvSpPr>
+          <p:nvPr>
+            <p:ph type="sldNum" sz="quarter" idx="12"/>
+          </p:nvPr>
+        </p:nvSpPr>
+        <p:spPr/>
+        <p:txBody>
+          <a:bodyPr/>
+          <a:lstStyle/>
+          <a:p>
+            <a:fld id="{B7C12E76-5DE4-834B-BE10-AD31AA7B20EC}" type="slidenum">
+              <a:rPr lang="en-US" smtClean="0"/>
+              <a:t>12</a:t>
+            </a:fld>
+            <a:endParaRPr lang="en-US"/>
+          </a:p>
+        </p:txBody>
+      </p:sp>
+      <p:sp>
+        <p:nvSpPr>
+          <p:cNvPr id="7" name="TextBox 6">
+            <a:extLst>
+              <a:ext uri="{FF2B5EF4-FFF2-40B4-BE49-F238E27FC236}">
+                <a16:creationId xmlns:a16="http://schemas.microsoft.com/office/drawing/2014/main" id="{D21CF190-1B75-9BF5-BD2C-196E677298D2}"/>
+              </a:ext>
+            </a:extLst>
+          </p:cNvPr>
+          <p:cNvSpPr txBox="1"/>
+          <p:nvPr/>
+        </p:nvSpPr>
+        <p:spPr>
+          <a:xfrm>
+            <a:off x="681318" y="1354594"/>
+            <a:ext cx="7749988" cy="1938992"/>
+          </a:xfrm>
+          <a:prstGeom prst="rect">
+            <a:avLst/>
+          </a:prstGeom>
+          <a:noFill/>
+        </p:spPr>
+        <p:txBody>
+          <a:bodyPr wrap="square">
+            <a:spAutoFit/>
+          </a:bodyPr>
+          <a:lstStyle/>
+          <a:p>
+            <a:r>
+              <a:rPr lang="en-US" sz="2400" dirty="0"/>
+              <a:t>Small-signal AC analysis:</a:t>
+            </a:r>
+          </a:p>
+          <a:p>
+            <a:pPr marL="285750" indent="-285750">
+              <a:buFont typeface="Arial" panose="020B0604020202020204" pitchFamily="34" charset="0"/>
+              <a:buChar char="•"/>
+            </a:pPr>
+            <a:r>
+              <a:rPr lang="en-US" sz="2400" dirty="0"/>
+              <a:t>Does </a:t>
+            </a:r>
+            <a:r>
+              <a:rPr lang="en-US" sz="2400" b="1" dirty="0"/>
+              <a:t>not</a:t>
+            </a:r>
+            <a:r>
+              <a:rPr lang="en-US" sz="2400" dirty="0"/>
+              <a:t> simulate time-domain waveforms</a:t>
+            </a:r>
+          </a:p>
+          <a:p>
+            <a:pPr marL="285750" indent="-285750">
+              <a:buFont typeface="Arial" panose="020B0604020202020204" pitchFamily="34" charset="0"/>
+              <a:buChar char="•"/>
+            </a:pPr>
+            <a:r>
+              <a:rPr lang="en-US" sz="2400" dirty="0"/>
+              <a:t>Does </a:t>
+            </a:r>
+            <a:r>
+              <a:rPr lang="en-US" sz="2400" b="1" dirty="0"/>
+              <a:t>not</a:t>
+            </a:r>
+            <a:r>
+              <a:rPr lang="en-US" sz="2400" dirty="0"/>
+              <a:t> show distortion or clipping</a:t>
+            </a:r>
+          </a:p>
+          <a:p>
+            <a:pPr marL="285750" indent="-285750">
+              <a:buFont typeface="Arial" panose="020B0604020202020204" pitchFamily="34" charset="0"/>
+              <a:buChar char="•"/>
+            </a:pPr>
+            <a:r>
+              <a:rPr lang="en-US" sz="2400" dirty="0"/>
+              <a:t>Does </a:t>
+            </a:r>
+            <a:r>
+              <a:rPr lang="en-US" sz="2400" b="1" dirty="0"/>
+              <a:t>not</a:t>
+            </a:r>
+            <a:r>
+              <a:rPr lang="en-US" sz="2400" dirty="0"/>
+              <a:t> handle large input swings</a:t>
+            </a:r>
+          </a:p>
+          <a:p>
+            <a:pPr marL="285750" indent="-285750">
+              <a:buFont typeface="Arial" panose="020B0604020202020204" pitchFamily="34" charset="0"/>
+              <a:buChar char="•"/>
+            </a:pPr>
+            <a:r>
+              <a:rPr lang="en-US" sz="2400" dirty="0"/>
+              <a:t>Does </a:t>
+            </a:r>
+            <a:r>
+              <a:rPr lang="en-US" sz="2400" b="1" dirty="0"/>
+              <a:t>not</a:t>
+            </a:r>
+            <a:r>
+              <a:rPr lang="en-US" sz="2400" dirty="0"/>
+              <a:t> model switching behavior</a:t>
+            </a:r>
+          </a:p>
+        </p:txBody>
+      </p:sp>
+      <p:sp>
+        <p:nvSpPr>
+          <p:cNvPr id="8" name="TextBox 7">
+            <a:extLst>
+              <a:ext uri="{FF2B5EF4-FFF2-40B4-BE49-F238E27FC236}">
+                <a16:creationId xmlns:a16="http://schemas.microsoft.com/office/drawing/2014/main" id="{8FA22F9A-3A51-5B3E-0216-BD2AAE528D44}"/>
+              </a:ext>
+            </a:extLst>
+          </p:cNvPr>
+          <p:cNvSpPr txBox="1"/>
+          <p:nvPr/>
+        </p:nvSpPr>
+        <p:spPr>
+          <a:xfrm>
+            <a:off x="681318" y="4017265"/>
+            <a:ext cx="7971794" cy="461665"/>
+          </a:xfrm>
+          <a:prstGeom prst="rect">
+            <a:avLst/>
+          </a:prstGeom>
+          <a:noFill/>
+        </p:spPr>
+        <p:txBody>
+          <a:bodyPr wrap="square">
+            <a:spAutoFit/>
+          </a:bodyPr>
+          <a:lstStyle/>
+          <a:p>
+            <a:r>
+              <a:rPr lang="en-US" sz="2400" dirty="0"/>
+              <a:t>When you set AC: 1 V it is not really 1 V, it is symbolic</a:t>
+            </a:r>
+          </a:p>
+        </p:txBody>
+      </p:sp>
+    </p:spTree>
+    <p:extLst>
+      <p:ext uri="{BB962C8B-B14F-4D97-AF65-F5344CB8AC3E}">
+        <p14:creationId xmlns:p14="http://schemas.microsoft.com/office/powerpoint/2010/main" val="1203586534"/>
+      </p:ext>
+    </p:extLst>
+  </p:cSld>
+  <p:clrMapOvr>
+    <a:masterClrMapping/>
+  </p:clrMapOvr>
+</p:sld>
+</file>
+
+<file path=ppt/slides/slide13.xml><?xml version="1.0" encoding="utf-8"?>
+<p:sld xmlns:a="http://schemas.openxmlformats.org/drawingml/2006/main" xmlns:r="http://schemas.openxmlformats.org/officeDocument/2006/relationships" xmlns:p="http://schemas.openxmlformats.org/presentationml/2006/main">
+  <p:cSld>
+    <p:spTree>
+      <p:nvGrpSpPr>
+        <p:cNvPr id="1" name=""/>
+        <p:cNvGrpSpPr/>
+        <p:nvPr/>
+      </p:nvGrpSpPr>
+      <p:grpSpPr>
+        <a:xfrm>
+          <a:off x="0" y="0"/>
+          <a:ext cx="0" cy="0"/>
+          <a:chOff x="0" y="0"/>
+          <a:chExt cx="0" cy="0"/>
+        </a:xfrm>
+      </p:grpSpPr>
+      <p:sp>
+        <p:nvSpPr>
+          <p:cNvPr id="2" name="Title 1">
+            <a:extLst>
+              <a:ext uri="{FF2B5EF4-FFF2-40B4-BE49-F238E27FC236}">
+                <a16:creationId xmlns:a16="http://schemas.microsoft.com/office/drawing/2014/main" id="{FE9E9F5F-E715-42C9-10BA-9262C9E72372}"/>
+              </a:ext>
+            </a:extLst>
+          </p:cNvPr>
+          <p:cNvSpPr>
+            <a:spLocks noGrp="1"/>
+          </p:cNvSpPr>
+          <p:nvPr>
+            <p:ph type="title"/>
+          </p:nvPr>
+        </p:nvSpPr>
+        <p:spPr/>
+        <p:txBody>
+          <a:bodyPr/>
+          <a:lstStyle/>
+          <a:p>
+            <a:r>
+              <a:rPr lang="en-US" dirty="0"/>
+              <a:t>Simulation: DC Sweep (.dc)</a:t>
+            </a:r>
+          </a:p>
+        </p:txBody>
+      </p:sp>
+      <p:sp>
+        <p:nvSpPr>
+          <p:cNvPr id="3" name="Date Placeholder 2">
+            <a:extLst>
+              <a:ext uri="{FF2B5EF4-FFF2-40B4-BE49-F238E27FC236}">
+                <a16:creationId xmlns:a16="http://schemas.microsoft.com/office/drawing/2014/main" id="{EC5F9975-D5D4-E9CD-5A54-AD5A1563065D}"/>
+              </a:ext>
+            </a:extLst>
+          </p:cNvPr>
+          <p:cNvSpPr>
+            <a:spLocks noGrp="1"/>
+          </p:cNvSpPr>
+          <p:nvPr>
+            <p:ph type="dt" sz="half" idx="10"/>
+          </p:nvPr>
+        </p:nvSpPr>
+        <p:spPr/>
+        <p:txBody>
+          <a:bodyPr/>
+          <a:lstStyle/>
+          <a:p>
+            <a:r>
+              <a:rPr lang="en-US"/>
+              <a:t>15/01/2026</a:t>
+            </a:r>
+          </a:p>
+        </p:txBody>
+      </p:sp>
+      <p:sp>
+        <p:nvSpPr>
+          <p:cNvPr id="4" name="Footer Placeholder 3">
+            <a:extLst>
+              <a:ext uri="{FF2B5EF4-FFF2-40B4-BE49-F238E27FC236}">
+                <a16:creationId xmlns:a16="http://schemas.microsoft.com/office/drawing/2014/main" id="{6095F2C6-6782-0807-BDB1-77B4F5E597B4}"/>
+              </a:ext>
+            </a:extLst>
+          </p:cNvPr>
+          <p:cNvSpPr>
+            <a:spLocks noGrp="1"/>
+          </p:cNvSpPr>
+          <p:nvPr>
+            <p:ph type="ftr" sz="quarter" idx="11"/>
+          </p:nvPr>
+        </p:nvSpPr>
+        <p:spPr/>
+        <p:txBody>
+          <a:bodyPr/>
+          <a:lstStyle/>
+          <a:p>
+            <a:r>
+              <a:rPr lang="en-US"/>
+              <a:t>Stefan Cristi Zugravel, elettronica base, TPS lezione 2</a:t>
+            </a:r>
+          </a:p>
+        </p:txBody>
+      </p:sp>
+      <p:sp>
+        <p:nvSpPr>
+          <p:cNvPr id="5" name="Slide Number Placeholder 4">
+            <a:extLst>
+              <a:ext uri="{FF2B5EF4-FFF2-40B4-BE49-F238E27FC236}">
+                <a16:creationId xmlns:a16="http://schemas.microsoft.com/office/drawing/2014/main" id="{0E13ADF3-C4F8-2342-6C5B-4DDB1DF1216C}"/>
+              </a:ext>
+            </a:extLst>
+          </p:cNvPr>
+          <p:cNvSpPr>
+            <a:spLocks noGrp="1"/>
+          </p:cNvSpPr>
+          <p:nvPr>
+            <p:ph type="sldNum" sz="quarter" idx="12"/>
+          </p:nvPr>
+        </p:nvSpPr>
+        <p:spPr/>
+        <p:txBody>
+          <a:bodyPr/>
+          <a:lstStyle/>
+          <a:p>
+            <a:fld id="{B7C12E76-5DE4-834B-BE10-AD31AA7B20EC}" type="slidenum">
+              <a:rPr lang="en-US" smtClean="0"/>
+              <a:t>13</a:t>
+            </a:fld>
+            <a:endParaRPr lang="en-US"/>
+          </a:p>
+        </p:txBody>
+      </p:sp>
+      <p:sp>
+        <p:nvSpPr>
+          <p:cNvPr id="7" name="TextBox 6">
+            <a:extLst>
+              <a:ext uri="{FF2B5EF4-FFF2-40B4-BE49-F238E27FC236}">
+                <a16:creationId xmlns:a16="http://schemas.microsoft.com/office/drawing/2014/main" id="{C7CCFF2B-C956-1B90-0082-BF2922B78E55}"/>
+              </a:ext>
+            </a:extLst>
+          </p:cNvPr>
+          <p:cNvSpPr txBox="1"/>
+          <p:nvPr/>
+        </p:nvSpPr>
+        <p:spPr>
+          <a:xfrm>
+            <a:off x="152397" y="948936"/>
+            <a:ext cx="10381130" cy="707886"/>
+          </a:xfrm>
+          <a:prstGeom prst="rect">
+            <a:avLst/>
+          </a:prstGeom>
+          <a:noFill/>
+        </p:spPr>
+        <p:txBody>
+          <a:bodyPr wrap="square">
+            <a:spAutoFit/>
+          </a:bodyPr>
+          <a:lstStyle/>
+          <a:p>
+            <a:pPr marL="285750" indent="-285750">
+              <a:buFont typeface="Arial" panose="020B0604020202020204" pitchFamily="34" charset="0"/>
+              <a:buChar char="•"/>
+            </a:pPr>
+            <a:r>
+              <a:rPr lang="en-US" sz="2000" dirty="0"/>
+              <a:t>DC sweep analysis sweeps the DC voltage of the input signal of the electronic circuit.</a:t>
+            </a:r>
+          </a:p>
+          <a:p>
+            <a:pPr marL="285750" indent="-285750">
+              <a:buFont typeface="Arial" panose="020B0604020202020204" pitchFamily="34" charset="0"/>
+              <a:buChar char="•"/>
+            </a:pPr>
+            <a:r>
+              <a:rPr lang="en-US" sz="2000" dirty="0"/>
+              <a:t>It is used to analyze DC characteristics of diodes, transistors, op amps and so on.</a:t>
+            </a:r>
+          </a:p>
+        </p:txBody>
+      </p:sp>
+      <p:pic>
+        <p:nvPicPr>
+          <p:cNvPr id="1026" name="Picture 2">
+            <a:extLst>
+              <a:ext uri="{FF2B5EF4-FFF2-40B4-BE49-F238E27FC236}">
+                <a16:creationId xmlns:a16="http://schemas.microsoft.com/office/drawing/2014/main" id="{31F14CCC-989C-8A7E-7D38-881B6E092820}"/>
+              </a:ext>
+            </a:extLst>
+          </p:cNvPr>
+          <p:cNvPicPr>
+            <a:picLocks noChangeAspect="1" noChangeArrowheads="1"/>
+          </p:cNvPicPr>
+          <p:nvPr/>
+        </p:nvPicPr>
+        <p:blipFill>
+          <a:blip r:embed="rId2">
+            <a:extLst>
+              <a:ext uri="{28A0092B-C50C-407E-A947-70E740481C1C}">
+                <a14:useLocalDpi xmlns:a14="http://schemas.microsoft.com/office/drawing/2010/main" val="0"/>
+              </a:ext>
+            </a:extLst>
+          </a:blip>
+          <a:srcRect/>
+          <a:stretch>
+            <a:fillRect/>
+          </a:stretch>
+        </p:blipFill>
+        <p:spPr bwMode="auto">
+          <a:xfrm>
+            <a:off x="2463656" y="1656822"/>
+            <a:ext cx="7264688" cy="4699528"/>
+          </a:xfrm>
+          <a:prstGeom prst="rect">
+            <a:avLst/>
+          </a:prstGeom>
+          <a:noFill/>
+          <a:extLst>
+            <a:ext uri="{909E8E84-426E-40DD-AFC4-6F175D3DCCD1}">
+              <a14:hiddenFill xmlns:a14="http://schemas.microsoft.com/office/drawing/2010/main">
+                <a:solidFill>
+                  <a:srgbClr val="FFFFFF"/>
+                </a:solidFill>
+              </a14:hiddenFill>
+            </a:ext>
+          </a:extLst>
+        </p:spPr>
+      </p:pic>
+    </p:spTree>
+    <p:extLst>
+      <p:ext uri="{BB962C8B-B14F-4D97-AF65-F5344CB8AC3E}">
+        <p14:creationId xmlns:p14="http://schemas.microsoft.com/office/powerpoint/2010/main" val="3267800609"/>
+      </p:ext>
+    </p:extLst>
+  </p:cSld>
+  <p:clrMapOvr>
+    <a:masterClrMapping/>
+  </p:clrMapOvr>
+</p:sld>
+</file>
+
+<file path=ppt/slides/slide14.xml><?xml version="1.0" encoding="utf-8"?>
+<p:sld xmlns:a="http://schemas.openxmlformats.org/drawingml/2006/main" xmlns:r="http://schemas.openxmlformats.org/officeDocument/2006/relationships" xmlns:p="http://schemas.openxmlformats.org/presentationml/2006/main">
+  <p:cSld>
+    <p:spTree>
+      <p:nvGrpSpPr>
+        <p:cNvPr id="1" name=""/>
+        <p:cNvGrpSpPr/>
+        <p:nvPr/>
+      </p:nvGrpSpPr>
+      <p:grpSpPr>
+        <a:xfrm>
+          <a:off x="0" y="0"/>
+          <a:ext cx="0" cy="0"/>
+          <a:chOff x="0" y="0"/>
+          <a:chExt cx="0" cy="0"/>
+        </a:xfrm>
+      </p:grpSpPr>
+      <p:sp>
+        <p:nvSpPr>
+          <p:cNvPr id="3" name="Date Placeholder 2">
+            <a:extLst>
+              <a:ext uri="{FF2B5EF4-FFF2-40B4-BE49-F238E27FC236}">
+                <a16:creationId xmlns:a16="http://schemas.microsoft.com/office/drawing/2014/main" id="{3CBAAFD0-01CD-515E-EA4D-A02A933ACD5B}"/>
+              </a:ext>
+            </a:extLst>
+          </p:cNvPr>
+          <p:cNvSpPr>
+            <a:spLocks noGrp="1"/>
+          </p:cNvSpPr>
+          <p:nvPr>
+            <p:ph type="dt" sz="half" idx="10"/>
+          </p:nvPr>
+        </p:nvSpPr>
+        <p:spPr/>
+        <p:txBody>
+          <a:bodyPr/>
+          <a:lstStyle/>
+          <a:p>
+            <a:r>
+              <a:rPr lang="en-US"/>
+              <a:t>15/01/2026</a:t>
+            </a:r>
+          </a:p>
+        </p:txBody>
+      </p:sp>
+      <p:sp>
+        <p:nvSpPr>
+          <p:cNvPr id="4" name="Footer Placeholder 3">
+            <a:extLst>
+              <a:ext uri="{FF2B5EF4-FFF2-40B4-BE49-F238E27FC236}">
+                <a16:creationId xmlns:a16="http://schemas.microsoft.com/office/drawing/2014/main" id="{CE76A60F-48D7-40E1-342C-D8FABD2E74BC}"/>
+              </a:ext>
+            </a:extLst>
+          </p:cNvPr>
+          <p:cNvSpPr>
+            <a:spLocks noGrp="1"/>
+          </p:cNvSpPr>
+          <p:nvPr>
+            <p:ph type="ftr" sz="quarter" idx="11"/>
+          </p:nvPr>
+        </p:nvSpPr>
+        <p:spPr/>
+        <p:txBody>
+          <a:bodyPr/>
+          <a:lstStyle/>
+          <a:p>
+            <a:r>
+              <a:rPr lang="en-US"/>
+              <a:t>Stefan Cristi Zugravel, elettronica base, TPS lezione 2</a:t>
+            </a:r>
+          </a:p>
+        </p:txBody>
+      </p:sp>
+      <p:sp>
+        <p:nvSpPr>
+          <p:cNvPr id="5" name="Slide Number Placeholder 4">
+            <a:extLst>
+              <a:ext uri="{FF2B5EF4-FFF2-40B4-BE49-F238E27FC236}">
+                <a16:creationId xmlns:a16="http://schemas.microsoft.com/office/drawing/2014/main" id="{0FB24FC5-6323-A587-7FF3-3CBDB62807E2}"/>
+              </a:ext>
+            </a:extLst>
+          </p:cNvPr>
+          <p:cNvSpPr>
+            <a:spLocks noGrp="1"/>
+          </p:cNvSpPr>
+          <p:nvPr>
+            <p:ph type="sldNum" sz="quarter" idx="12"/>
+          </p:nvPr>
+        </p:nvSpPr>
+        <p:spPr/>
+        <p:txBody>
+          <a:bodyPr/>
+          <a:lstStyle/>
+          <a:p>
+            <a:fld id="{B7C12E76-5DE4-834B-BE10-AD31AA7B20EC}" type="slidenum">
+              <a:rPr lang="en-US" smtClean="0"/>
+              <a:t>14</a:t>
+            </a:fld>
+            <a:endParaRPr lang="en-US"/>
+          </a:p>
+        </p:txBody>
+      </p:sp>
+      <p:pic>
+        <p:nvPicPr>
+          <p:cNvPr id="6" name="Picture 5">
+            <a:extLst>
+              <a:ext uri="{FF2B5EF4-FFF2-40B4-BE49-F238E27FC236}">
+                <a16:creationId xmlns:a16="http://schemas.microsoft.com/office/drawing/2014/main" id="{29F1A6D8-AC36-32D6-1136-493E571CF827}"/>
+              </a:ext>
+            </a:extLst>
+          </p:cNvPr>
+          <p:cNvPicPr>
+            <a:picLocks noChangeAspect="1"/>
+          </p:cNvPicPr>
+          <p:nvPr/>
+        </p:nvPicPr>
+        <p:blipFill>
+          <a:blip r:embed="rId2"/>
+          <a:stretch>
+            <a:fillRect/>
+          </a:stretch>
+        </p:blipFill>
+        <p:spPr>
+          <a:xfrm>
+            <a:off x="1799664" y="0"/>
+            <a:ext cx="8592672" cy="6415077"/>
+          </a:xfrm>
+          <a:prstGeom prst="rect">
+            <a:avLst/>
+          </a:prstGeom>
+        </p:spPr>
+      </p:pic>
+    </p:spTree>
+    <p:extLst>
+      <p:ext uri="{BB962C8B-B14F-4D97-AF65-F5344CB8AC3E}">
+        <p14:creationId xmlns:p14="http://schemas.microsoft.com/office/powerpoint/2010/main" val="1232341735"/>
+      </p:ext>
+    </p:extLst>
+  </p:cSld>
+  <p:clrMapOvr>
+    <a:masterClrMapping/>
+  </p:clrMapOvr>
+</p:sld>
+</file>
+
+<file path=ppt/slides/slide15.xml><?xml version="1.0" encoding="utf-8"?>
+<p:sld xmlns:a="http://schemas.openxmlformats.org/drawingml/2006/main" xmlns:r="http://schemas.openxmlformats.org/officeDocument/2006/relationships" xmlns:p="http://schemas.openxmlformats.org/presentationml/2006/main">
+  <p:cSld>
+    <p:spTree>
+      <p:nvGrpSpPr>
+        <p:cNvPr id="1" name=""/>
+        <p:cNvGrpSpPr/>
+        <p:nvPr/>
+      </p:nvGrpSpPr>
+      <p:grpSpPr>
+        <a:xfrm>
+          <a:off x="0" y="0"/>
+          <a:ext cx="0" cy="0"/>
+          <a:chOff x="0" y="0"/>
+          <a:chExt cx="0" cy="0"/>
+        </a:xfrm>
+      </p:grpSpPr>
+      <p:sp>
+        <p:nvSpPr>
+          <p:cNvPr id="2" name="Title 1">
+            <a:extLst>
+              <a:ext uri="{FF2B5EF4-FFF2-40B4-BE49-F238E27FC236}">
+                <a16:creationId xmlns:a16="http://schemas.microsoft.com/office/drawing/2014/main" id="{CDB68023-AF5A-4E6D-4418-750D164001F5}"/>
+              </a:ext>
+            </a:extLst>
+          </p:cNvPr>
+          <p:cNvSpPr>
+            <a:spLocks noGrp="1"/>
+          </p:cNvSpPr>
+          <p:nvPr>
+            <p:ph type="title"/>
+          </p:nvPr>
+        </p:nvSpPr>
+        <p:spPr/>
+        <p:txBody>
+          <a:bodyPr/>
+          <a:lstStyle/>
+          <a:p>
+            <a:endParaRPr lang="en-US"/>
+          </a:p>
+        </p:txBody>
+      </p:sp>
+      <p:sp>
+        <p:nvSpPr>
+          <p:cNvPr id="3" name="Date Placeholder 2">
+            <a:extLst>
+              <a:ext uri="{FF2B5EF4-FFF2-40B4-BE49-F238E27FC236}">
+                <a16:creationId xmlns:a16="http://schemas.microsoft.com/office/drawing/2014/main" id="{6199AF3E-D271-0D0E-8F8F-AC42B117CCF0}"/>
+              </a:ext>
+            </a:extLst>
+          </p:cNvPr>
+          <p:cNvSpPr>
+            <a:spLocks noGrp="1"/>
+          </p:cNvSpPr>
+          <p:nvPr>
+            <p:ph type="dt" sz="half" idx="10"/>
+          </p:nvPr>
+        </p:nvSpPr>
+        <p:spPr/>
+        <p:txBody>
+          <a:bodyPr/>
+          <a:lstStyle/>
+          <a:p>
+            <a:r>
+              <a:rPr lang="en-US"/>
+              <a:t>15/01/2026</a:t>
+            </a:r>
+          </a:p>
+        </p:txBody>
+      </p:sp>
+      <p:sp>
+        <p:nvSpPr>
+          <p:cNvPr id="4" name="Footer Placeholder 3">
+            <a:extLst>
+              <a:ext uri="{FF2B5EF4-FFF2-40B4-BE49-F238E27FC236}">
+                <a16:creationId xmlns:a16="http://schemas.microsoft.com/office/drawing/2014/main" id="{1E675BE5-0B0D-BB52-FF35-4693413BB2E7}"/>
+              </a:ext>
+            </a:extLst>
+          </p:cNvPr>
+          <p:cNvSpPr>
+            <a:spLocks noGrp="1"/>
+          </p:cNvSpPr>
+          <p:nvPr>
+            <p:ph type="ftr" sz="quarter" idx="11"/>
+          </p:nvPr>
+        </p:nvSpPr>
+        <p:spPr/>
+        <p:txBody>
+          <a:bodyPr/>
+          <a:lstStyle/>
+          <a:p>
+            <a:r>
+              <a:rPr lang="en-US"/>
+              <a:t>Stefan Cristi Zugravel, elettronica base, TPS lezione 2</a:t>
+            </a:r>
+          </a:p>
+        </p:txBody>
+      </p:sp>
+      <p:sp>
+        <p:nvSpPr>
+          <p:cNvPr id="5" name="Slide Number Placeholder 4">
+            <a:extLst>
+              <a:ext uri="{FF2B5EF4-FFF2-40B4-BE49-F238E27FC236}">
+                <a16:creationId xmlns:a16="http://schemas.microsoft.com/office/drawing/2014/main" id="{4E042B2F-FDB6-AF53-7B37-5DD5F6FC5F92}"/>
+              </a:ext>
+            </a:extLst>
+          </p:cNvPr>
+          <p:cNvSpPr>
+            <a:spLocks noGrp="1"/>
+          </p:cNvSpPr>
+          <p:nvPr>
+            <p:ph type="sldNum" sz="quarter" idx="12"/>
+          </p:nvPr>
+        </p:nvSpPr>
+        <p:spPr/>
+        <p:txBody>
+          <a:bodyPr/>
+          <a:lstStyle/>
+          <a:p>
+            <a:fld id="{B7C12E76-5DE4-834B-BE10-AD31AA7B20EC}" type="slidenum">
+              <a:rPr lang="en-US" smtClean="0"/>
+              <a:t>15</a:t>
+            </a:fld>
+            <a:endParaRPr lang="en-US"/>
+          </a:p>
+        </p:txBody>
+      </p:sp>
+    </p:spTree>
+    <p:extLst>
+      <p:ext uri="{BB962C8B-B14F-4D97-AF65-F5344CB8AC3E}">
+        <p14:creationId xmlns:p14="http://schemas.microsoft.com/office/powerpoint/2010/main" val="2961610399"/>
+      </p:ext>
+    </p:extLst>
+  </p:cSld>
+  <p:clrMapOvr>
+    <a:masterClrMapping/>
+  </p:clrMapOvr>
+</p:sld>
+</file>
+
+<file path=ppt/slides/slide16.xml><?xml version="1.0" encoding="utf-8"?>
+<p:sld xmlns:a="http://schemas.openxmlformats.org/drawingml/2006/main" xmlns:r="http://schemas.openxmlformats.org/officeDocument/2006/relationships" xmlns:p="http://schemas.openxmlformats.org/presentationml/2006/main">
+  <p:cSld>
+    <p:spTree>
+      <p:nvGrpSpPr>
+        <p:cNvPr id="1" name=""/>
+        <p:cNvGrpSpPr/>
+        <p:nvPr/>
+      </p:nvGrpSpPr>
+      <p:grpSpPr>
+        <a:xfrm>
+          <a:off x="0" y="0"/>
+          <a:ext cx="0" cy="0"/>
+          <a:chOff x="0" y="0"/>
+          <a:chExt cx="0" cy="0"/>
+        </a:xfrm>
+      </p:grpSpPr>
+      <p:sp>
+        <p:nvSpPr>
+          <p:cNvPr id="2" name="Title 1">
+            <a:extLst>
+              <a:ext uri="{FF2B5EF4-FFF2-40B4-BE49-F238E27FC236}">
+                <a16:creationId xmlns:a16="http://schemas.microsoft.com/office/drawing/2014/main" id="{4169237F-F634-FD7A-1BAB-D143BF33F35A}"/>
+              </a:ext>
+            </a:extLst>
+          </p:cNvPr>
+          <p:cNvSpPr>
+            <a:spLocks noGrp="1"/>
+          </p:cNvSpPr>
+          <p:nvPr>
+            <p:ph type="title"/>
+          </p:nvPr>
+        </p:nvSpPr>
+        <p:spPr/>
+        <p:txBody>
+          <a:bodyPr/>
+          <a:lstStyle/>
+          <a:p>
+            <a:endParaRPr lang="en-US"/>
+          </a:p>
+        </p:txBody>
+      </p:sp>
+      <p:sp>
+        <p:nvSpPr>
+          <p:cNvPr id="3" name="Date Placeholder 2">
+            <a:extLst>
+              <a:ext uri="{FF2B5EF4-FFF2-40B4-BE49-F238E27FC236}">
+                <a16:creationId xmlns:a16="http://schemas.microsoft.com/office/drawing/2014/main" id="{3049902B-84E1-602A-EF61-656DAF566F68}"/>
+              </a:ext>
+            </a:extLst>
+          </p:cNvPr>
+          <p:cNvSpPr>
+            <a:spLocks noGrp="1"/>
+          </p:cNvSpPr>
+          <p:nvPr>
+            <p:ph type="dt" sz="half" idx="10"/>
+          </p:nvPr>
+        </p:nvSpPr>
+        <p:spPr/>
+        <p:txBody>
+          <a:bodyPr/>
+          <a:lstStyle/>
+          <a:p>
+            <a:r>
+              <a:rPr lang="en-US"/>
+              <a:t>15/01/2026</a:t>
+            </a:r>
+          </a:p>
+        </p:txBody>
+      </p:sp>
+      <p:sp>
+        <p:nvSpPr>
+          <p:cNvPr id="4" name="Footer Placeholder 3">
+            <a:extLst>
+              <a:ext uri="{FF2B5EF4-FFF2-40B4-BE49-F238E27FC236}">
+                <a16:creationId xmlns:a16="http://schemas.microsoft.com/office/drawing/2014/main" id="{E6118F44-3957-6CEF-C2CC-52B9551A2432}"/>
+              </a:ext>
+            </a:extLst>
+          </p:cNvPr>
+          <p:cNvSpPr>
+            <a:spLocks noGrp="1"/>
+          </p:cNvSpPr>
+          <p:nvPr>
+            <p:ph type="ftr" sz="quarter" idx="11"/>
+          </p:nvPr>
+        </p:nvSpPr>
+        <p:spPr/>
+        <p:txBody>
+          <a:bodyPr/>
+          <a:lstStyle/>
+          <a:p>
+            <a:r>
+              <a:rPr lang="en-US"/>
+              <a:t>Stefan Cristi Zugravel, elettronica base, TPS lezione 2</a:t>
+            </a:r>
+          </a:p>
+        </p:txBody>
+      </p:sp>
+      <p:sp>
+        <p:nvSpPr>
+          <p:cNvPr id="5" name="Slide Number Placeholder 4">
+            <a:extLst>
+              <a:ext uri="{FF2B5EF4-FFF2-40B4-BE49-F238E27FC236}">
+                <a16:creationId xmlns:a16="http://schemas.microsoft.com/office/drawing/2014/main" id="{A7582A30-7EAA-8F00-7106-BA69A55B13E9}"/>
+              </a:ext>
+            </a:extLst>
+          </p:cNvPr>
+          <p:cNvSpPr>
+            <a:spLocks noGrp="1"/>
+          </p:cNvSpPr>
+          <p:nvPr>
+            <p:ph type="sldNum" sz="quarter" idx="12"/>
+          </p:nvPr>
+        </p:nvSpPr>
+        <p:spPr/>
+        <p:txBody>
+          <a:bodyPr/>
+          <a:lstStyle/>
+          <a:p>
+            <a:fld id="{B7C12E76-5DE4-834B-BE10-AD31AA7B20EC}" type="slidenum">
+              <a:rPr lang="en-US" smtClean="0"/>
+              <a:t>16</a:t>
+            </a:fld>
+            <a:endParaRPr lang="en-US"/>
+          </a:p>
+        </p:txBody>
+      </p:sp>
+    </p:spTree>
+    <p:extLst>
+      <p:ext uri="{BB962C8B-B14F-4D97-AF65-F5344CB8AC3E}">
+        <p14:creationId xmlns:p14="http://schemas.microsoft.com/office/powerpoint/2010/main" val="3124815261"/>
+      </p:ext>
+    </p:extLst>
+  </p:cSld>
+  <p:clrMapOvr>
+    <a:masterClrMapping/>
+  </p:clrMapOvr>
+</p:sld>
+</file>
+
+<file path=ppt/slides/slide17.xml><?xml version="1.0" encoding="utf-8"?>
+<p:sld xmlns:a="http://schemas.openxmlformats.org/drawingml/2006/main" xmlns:r="http://schemas.openxmlformats.org/officeDocument/2006/relationships" xmlns:p="http://schemas.openxmlformats.org/presentationml/2006/main">
+  <p:cSld>
+    <p:spTree>
+      <p:nvGrpSpPr>
+        <p:cNvPr id="1" name=""/>
+        <p:cNvGrpSpPr/>
+        <p:nvPr/>
+      </p:nvGrpSpPr>
+      <p:grpSpPr>
+        <a:xfrm>
+          <a:off x="0" y="0"/>
+          <a:ext cx="0" cy="0"/>
+          <a:chOff x="0" y="0"/>
+          <a:chExt cx="0" cy="0"/>
+        </a:xfrm>
+      </p:grpSpPr>
+      <p:sp>
+        <p:nvSpPr>
+          <p:cNvPr id="2" name="Title 1">
+            <a:extLst>
+              <a:ext uri="{FF2B5EF4-FFF2-40B4-BE49-F238E27FC236}">
+                <a16:creationId xmlns:a16="http://schemas.microsoft.com/office/drawing/2014/main" id="{DCCEAC1A-7161-A6FD-288F-4E3703960CBE}"/>
+              </a:ext>
+            </a:extLst>
+          </p:cNvPr>
+          <p:cNvSpPr>
+            <a:spLocks noGrp="1"/>
+          </p:cNvSpPr>
+          <p:nvPr>
+            <p:ph type="title"/>
+          </p:nvPr>
+        </p:nvSpPr>
+        <p:spPr/>
+        <p:txBody>
+          <a:bodyPr/>
+          <a:lstStyle/>
+          <a:p>
+            <a:endParaRPr lang="en-US"/>
+          </a:p>
+        </p:txBody>
+      </p:sp>
+      <p:sp>
+        <p:nvSpPr>
+          <p:cNvPr id="3" name="Date Placeholder 2">
+            <a:extLst>
+              <a:ext uri="{FF2B5EF4-FFF2-40B4-BE49-F238E27FC236}">
+                <a16:creationId xmlns:a16="http://schemas.microsoft.com/office/drawing/2014/main" id="{397571D6-2A3A-4BAB-8976-4727C0F5687A}"/>
+              </a:ext>
+            </a:extLst>
+          </p:cNvPr>
+          <p:cNvSpPr>
+            <a:spLocks noGrp="1"/>
+          </p:cNvSpPr>
+          <p:nvPr>
+            <p:ph type="dt" sz="half" idx="10"/>
+          </p:nvPr>
+        </p:nvSpPr>
+        <p:spPr/>
+        <p:txBody>
+          <a:bodyPr/>
+          <a:lstStyle/>
+          <a:p>
+            <a:r>
+              <a:rPr lang="en-US"/>
+              <a:t>15/01/2026</a:t>
+            </a:r>
+          </a:p>
+        </p:txBody>
+      </p:sp>
+      <p:sp>
+        <p:nvSpPr>
+          <p:cNvPr id="4" name="Footer Placeholder 3">
+            <a:extLst>
+              <a:ext uri="{FF2B5EF4-FFF2-40B4-BE49-F238E27FC236}">
+                <a16:creationId xmlns:a16="http://schemas.microsoft.com/office/drawing/2014/main" id="{159E0C11-1069-C1DB-BB78-E93E9BF056D3}"/>
+              </a:ext>
+            </a:extLst>
+          </p:cNvPr>
+          <p:cNvSpPr>
+            <a:spLocks noGrp="1"/>
+          </p:cNvSpPr>
+          <p:nvPr>
+            <p:ph type="ftr" sz="quarter" idx="11"/>
+          </p:nvPr>
+        </p:nvSpPr>
+        <p:spPr/>
+        <p:txBody>
+          <a:bodyPr/>
+          <a:lstStyle/>
+          <a:p>
+            <a:r>
+              <a:rPr lang="en-US"/>
+              <a:t>Stefan Cristi Zugravel, elettronica base, TPS lezione 2</a:t>
+            </a:r>
+          </a:p>
+        </p:txBody>
+      </p:sp>
+      <p:sp>
+        <p:nvSpPr>
+          <p:cNvPr id="5" name="Slide Number Placeholder 4">
+            <a:extLst>
+              <a:ext uri="{FF2B5EF4-FFF2-40B4-BE49-F238E27FC236}">
+                <a16:creationId xmlns:a16="http://schemas.microsoft.com/office/drawing/2014/main" id="{88B5A397-3940-1BD3-A251-C597FFF3DD97}"/>
+              </a:ext>
+            </a:extLst>
+          </p:cNvPr>
+          <p:cNvSpPr>
+            <a:spLocks noGrp="1"/>
+          </p:cNvSpPr>
+          <p:nvPr>
+            <p:ph type="sldNum" sz="quarter" idx="12"/>
+          </p:nvPr>
+        </p:nvSpPr>
+        <p:spPr/>
+        <p:txBody>
+          <a:bodyPr/>
+          <a:lstStyle/>
+          <a:p>
+            <a:fld id="{B7C12E76-5DE4-834B-BE10-AD31AA7B20EC}" type="slidenum">
+              <a:rPr lang="en-US" smtClean="0"/>
+              <a:t>17</a:t>
+            </a:fld>
+            <a:endParaRPr lang="en-US"/>
+          </a:p>
+        </p:txBody>
+      </p:sp>
+    </p:spTree>
+    <p:extLst>
+      <p:ext uri="{BB962C8B-B14F-4D97-AF65-F5344CB8AC3E}">
+        <p14:creationId xmlns:p14="http://schemas.microsoft.com/office/powerpoint/2010/main" val="3973717054"/>
+      </p:ext>
+    </p:extLst>
+  </p:cSld>
+  <p:clrMapOvr>
+    <a:masterClrMapping/>
+  </p:clrMapOvr>
+</p:sld>
+</file>
+
+<file path=ppt/slides/slide18.xml><?xml version="1.0" encoding="utf-8"?>
+<p:sld xmlns:a="http://schemas.openxmlformats.org/drawingml/2006/main" xmlns:r="http://schemas.openxmlformats.org/officeDocument/2006/relationships" xmlns:p="http://schemas.openxmlformats.org/presentationml/2006/main">
+  <p:cSld>
+    <p:spTree>
+      <p:nvGrpSpPr>
+        <p:cNvPr id="1" name=""/>
+        <p:cNvGrpSpPr/>
+        <p:nvPr/>
+      </p:nvGrpSpPr>
+      <p:grpSpPr>
+        <a:xfrm>
+          <a:off x="0" y="0"/>
+          <a:ext cx="0" cy="0"/>
+          <a:chOff x="0" y="0"/>
+          <a:chExt cx="0" cy="0"/>
+        </a:xfrm>
+      </p:grpSpPr>
+      <p:sp>
+        <p:nvSpPr>
+          <p:cNvPr id="2" name="Title 1">
+            <a:extLst>
+              <a:ext uri="{FF2B5EF4-FFF2-40B4-BE49-F238E27FC236}">
+                <a16:creationId xmlns:a16="http://schemas.microsoft.com/office/drawing/2014/main" id="{58FCE3EB-C4ED-4652-7752-68DA419DA27E}"/>
+              </a:ext>
+            </a:extLst>
+          </p:cNvPr>
+          <p:cNvSpPr>
+            <a:spLocks noGrp="1"/>
+          </p:cNvSpPr>
+          <p:nvPr>
+            <p:ph type="title"/>
+          </p:nvPr>
+        </p:nvSpPr>
+        <p:spPr/>
+        <p:txBody>
+          <a:bodyPr/>
+          <a:lstStyle/>
+          <a:p>
+            <a:endParaRPr lang="en-US"/>
+          </a:p>
+        </p:txBody>
+      </p:sp>
+      <p:sp>
+        <p:nvSpPr>
+          <p:cNvPr id="3" name="Date Placeholder 2">
+            <a:extLst>
+              <a:ext uri="{FF2B5EF4-FFF2-40B4-BE49-F238E27FC236}">
+                <a16:creationId xmlns:a16="http://schemas.microsoft.com/office/drawing/2014/main" id="{F26C27C9-7995-07BE-C555-383822CFE85F}"/>
+              </a:ext>
+            </a:extLst>
+          </p:cNvPr>
+          <p:cNvSpPr>
+            <a:spLocks noGrp="1"/>
+          </p:cNvSpPr>
+          <p:nvPr>
+            <p:ph type="dt" sz="half" idx="10"/>
+          </p:nvPr>
+        </p:nvSpPr>
+        <p:spPr/>
+        <p:txBody>
+          <a:bodyPr/>
+          <a:lstStyle/>
+          <a:p>
+            <a:r>
+              <a:rPr lang="en-US"/>
+              <a:t>15/01/2026</a:t>
+            </a:r>
+          </a:p>
+        </p:txBody>
+      </p:sp>
+      <p:sp>
+        <p:nvSpPr>
+          <p:cNvPr id="4" name="Footer Placeholder 3">
+            <a:extLst>
+              <a:ext uri="{FF2B5EF4-FFF2-40B4-BE49-F238E27FC236}">
+                <a16:creationId xmlns:a16="http://schemas.microsoft.com/office/drawing/2014/main" id="{F333095F-EE95-C709-3EA3-D81463786F1F}"/>
+              </a:ext>
+            </a:extLst>
+          </p:cNvPr>
+          <p:cNvSpPr>
+            <a:spLocks noGrp="1"/>
+          </p:cNvSpPr>
+          <p:nvPr>
+            <p:ph type="ftr" sz="quarter" idx="11"/>
+          </p:nvPr>
+        </p:nvSpPr>
+        <p:spPr/>
+        <p:txBody>
+          <a:bodyPr/>
+          <a:lstStyle/>
+          <a:p>
+            <a:r>
+              <a:rPr lang="en-US"/>
+              <a:t>Stefan Cristi Zugravel, elettronica base, TPS lezione 2</a:t>
+            </a:r>
+          </a:p>
+        </p:txBody>
+      </p:sp>
+      <p:sp>
+        <p:nvSpPr>
+          <p:cNvPr id="5" name="Slide Number Placeholder 4">
+            <a:extLst>
+              <a:ext uri="{FF2B5EF4-FFF2-40B4-BE49-F238E27FC236}">
+                <a16:creationId xmlns:a16="http://schemas.microsoft.com/office/drawing/2014/main" id="{E9E1527A-93F1-CCB6-74B2-697E4B9ECAF6}"/>
+              </a:ext>
+            </a:extLst>
+          </p:cNvPr>
+          <p:cNvSpPr>
+            <a:spLocks noGrp="1"/>
+          </p:cNvSpPr>
+          <p:nvPr>
+            <p:ph type="sldNum" sz="quarter" idx="12"/>
+          </p:nvPr>
+        </p:nvSpPr>
+        <p:spPr/>
+        <p:txBody>
+          <a:bodyPr/>
+          <a:lstStyle/>
+          <a:p>
+            <a:fld id="{B7C12E76-5DE4-834B-BE10-AD31AA7B20EC}" type="slidenum">
+              <a:rPr lang="en-US" smtClean="0"/>
+              <a:t>18</a:t>
+            </a:fld>
+            <a:endParaRPr lang="en-US"/>
+          </a:p>
+        </p:txBody>
+      </p:sp>
+    </p:spTree>
+    <p:extLst>
+      <p:ext uri="{BB962C8B-B14F-4D97-AF65-F5344CB8AC3E}">
+        <p14:creationId xmlns:p14="http://schemas.microsoft.com/office/powerpoint/2010/main" val="2246316332"/>
+      </p:ext>
+    </p:extLst>
+  </p:cSld>
+  <p:clrMapOvr>
+    <a:masterClrMapping/>
+  </p:clrMapOvr>
+</p:sld>
+</file>
+
+<file path=ppt/slides/slide19.xml><?xml version="1.0" encoding="utf-8"?>
+<p:sld xmlns:a="http://schemas.openxmlformats.org/drawingml/2006/main" xmlns:r="http://schemas.openxmlformats.org/officeDocument/2006/relationships" xmlns:p="http://schemas.openxmlformats.org/presentationml/2006/main">
+  <p:cSld>
+    <p:spTree>
+      <p:nvGrpSpPr>
+        <p:cNvPr id="1" name=""/>
+        <p:cNvGrpSpPr/>
+        <p:nvPr/>
+      </p:nvGrpSpPr>
+      <p:grpSpPr>
+        <a:xfrm>
+          <a:off x="0" y="0"/>
+          <a:ext cx="0" cy="0"/>
+          <a:chOff x="0" y="0"/>
+          <a:chExt cx="0" cy="0"/>
+        </a:xfrm>
+      </p:grpSpPr>
+      <p:sp>
+        <p:nvSpPr>
+          <p:cNvPr id="2" name="Title 1">
+            <a:extLst>
+              <a:ext uri="{FF2B5EF4-FFF2-40B4-BE49-F238E27FC236}">
+                <a16:creationId xmlns:a16="http://schemas.microsoft.com/office/drawing/2014/main" id="{CDDC16BE-D006-9849-F2EE-4509081ABC82}"/>
+              </a:ext>
+            </a:extLst>
+          </p:cNvPr>
+          <p:cNvSpPr>
+            <a:spLocks noGrp="1"/>
+          </p:cNvSpPr>
+          <p:nvPr>
+            <p:ph type="title"/>
+          </p:nvPr>
+        </p:nvSpPr>
+        <p:spPr/>
+        <p:txBody>
+          <a:bodyPr/>
+          <a:lstStyle/>
+          <a:p>
+            <a:endParaRPr lang="en-US"/>
+          </a:p>
+        </p:txBody>
+      </p:sp>
+      <p:sp>
+        <p:nvSpPr>
+          <p:cNvPr id="3" name="Date Placeholder 2">
+            <a:extLst>
+              <a:ext uri="{FF2B5EF4-FFF2-40B4-BE49-F238E27FC236}">
+                <a16:creationId xmlns:a16="http://schemas.microsoft.com/office/drawing/2014/main" id="{673FEB70-D6E4-9697-98E2-B763257751E2}"/>
+              </a:ext>
+            </a:extLst>
+          </p:cNvPr>
+          <p:cNvSpPr>
+            <a:spLocks noGrp="1"/>
+          </p:cNvSpPr>
+          <p:nvPr>
+            <p:ph type="dt" sz="half" idx="10"/>
+          </p:nvPr>
+        </p:nvSpPr>
+        <p:spPr/>
+        <p:txBody>
+          <a:bodyPr/>
+          <a:lstStyle/>
+          <a:p>
+            <a:r>
+              <a:rPr lang="en-US"/>
+              <a:t>15/01/2026</a:t>
+            </a:r>
+          </a:p>
+        </p:txBody>
+      </p:sp>
+      <p:sp>
+        <p:nvSpPr>
+          <p:cNvPr id="4" name="Footer Placeholder 3">
+            <a:extLst>
+              <a:ext uri="{FF2B5EF4-FFF2-40B4-BE49-F238E27FC236}">
+                <a16:creationId xmlns:a16="http://schemas.microsoft.com/office/drawing/2014/main" id="{F2D5B231-80E0-38B7-96C2-B1B7D00CD876}"/>
+              </a:ext>
+            </a:extLst>
+          </p:cNvPr>
+          <p:cNvSpPr>
+            <a:spLocks noGrp="1"/>
+          </p:cNvSpPr>
+          <p:nvPr>
+            <p:ph type="ftr" sz="quarter" idx="11"/>
+          </p:nvPr>
+        </p:nvSpPr>
+        <p:spPr/>
+        <p:txBody>
+          <a:bodyPr/>
+          <a:lstStyle/>
+          <a:p>
+            <a:r>
+              <a:rPr lang="en-US"/>
+              <a:t>Stefan Cristi Zugravel, elettronica base, TPS lezione 2</a:t>
+            </a:r>
+          </a:p>
+        </p:txBody>
+      </p:sp>
+      <p:sp>
+        <p:nvSpPr>
+          <p:cNvPr id="5" name="Slide Number Placeholder 4">
+            <a:extLst>
+              <a:ext uri="{FF2B5EF4-FFF2-40B4-BE49-F238E27FC236}">
+                <a16:creationId xmlns:a16="http://schemas.microsoft.com/office/drawing/2014/main" id="{5B0C70FE-7B76-FFBE-6315-D3E506BB67D0}"/>
+              </a:ext>
+            </a:extLst>
+          </p:cNvPr>
+          <p:cNvSpPr>
+            <a:spLocks noGrp="1"/>
+          </p:cNvSpPr>
+          <p:nvPr>
+            <p:ph type="sldNum" sz="quarter" idx="12"/>
+          </p:nvPr>
+        </p:nvSpPr>
+        <p:spPr/>
+        <p:txBody>
+          <a:bodyPr/>
+          <a:lstStyle/>
+          <a:p>
+            <a:fld id="{B7C12E76-5DE4-834B-BE10-AD31AA7B20EC}" type="slidenum">
+              <a:rPr lang="en-US" smtClean="0"/>
+              <a:t>19</a:t>
+            </a:fld>
+            <a:endParaRPr lang="en-US"/>
+          </a:p>
+        </p:txBody>
+      </p:sp>
+    </p:spTree>
+    <p:extLst>
+      <p:ext uri="{BB962C8B-B14F-4D97-AF65-F5344CB8AC3E}">
+        <p14:creationId xmlns:p14="http://schemas.microsoft.com/office/powerpoint/2010/main" val="456140108"/>
       </p:ext>
     </p:extLst>
   </p:cSld>
@@ -3913,7 +5737,10 @@
           <a:bodyPr/>
           <a:lstStyle/>
           <a:p>
-            <a:endParaRPr lang="en-US"/>
+            <a:r>
+              <a:rPr lang="en-US" dirty="0"/>
+              <a:t>What is SPICE?</a:t>
+            </a:r>
           </a:p>
         </p:txBody>
       </p:sp>
@@ -4002,10 +5829,282 @@
           </a:p>
         </p:txBody>
       </p:sp>
+      <p:sp>
+        <p:nvSpPr>
+          <p:cNvPr id="7" name="TextBox 6">
+            <a:extLst>
+              <a:ext uri="{FF2B5EF4-FFF2-40B4-BE49-F238E27FC236}">
+                <a16:creationId xmlns:a16="http://schemas.microsoft.com/office/drawing/2014/main" id="{355A475A-6635-E1C4-FEBF-F5E2EC08A240}"/>
+              </a:ext>
+            </a:extLst>
+          </p:cNvPr>
+          <p:cNvSpPr txBox="1"/>
+          <p:nvPr/>
+        </p:nvSpPr>
+        <p:spPr>
+          <a:xfrm>
+            <a:off x="667871" y="985299"/>
+            <a:ext cx="9220199" cy="1938992"/>
+          </a:xfrm>
+          <a:prstGeom prst="rect">
+            <a:avLst/>
+          </a:prstGeom>
+          <a:noFill/>
+        </p:spPr>
+        <p:txBody>
+          <a:bodyPr wrap="square">
+            <a:spAutoFit/>
+          </a:bodyPr>
+          <a:lstStyle/>
+          <a:p>
+            <a:pPr marL="285750" indent="-285750">
+              <a:buFont typeface="Arial" panose="020B0604020202020204" pitchFamily="34" charset="0"/>
+              <a:buChar char="•"/>
+            </a:pPr>
+            <a:r>
+              <a:rPr lang="en-US" sz="2400" b="1" dirty="0"/>
+              <a:t>S</a:t>
+            </a:r>
+            <a:r>
+              <a:rPr lang="en-US" sz="2400" dirty="0"/>
+              <a:t>imulation </a:t>
+            </a:r>
+            <a:r>
+              <a:rPr lang="en-US" sz="2400" b="1" dirty="0"/>
+              <a:t>P</a:t>
+            </a:r>
+            <a:r>
+              <a:rPr lang="en-US" sz="2400" dirty="0"/>
+              <a:t>rogram with </a:t>
+            </a:r>
+            <a:r>
+              <a:rPr lang="en-US" sz="2400" b="1" dirty="0"/>
+              <a:t>I</a:t>
+            </a:r>
+            <a:r>
+              <a:rPr lang="en-US" sz="2400" dirty="0"/>
+              <a:t>ntegrated </a:t>
+            </a:r>
+            <a:r>
+              <a:rPr lang="en-US" sz="2400" b="1" dirty="0"/>
+              <a:t>C</a:t>
+            </a:r>
+            <a:r>
+              <a:rPr lang="en-US" sz="2400" dirty="0"/>
+              <a:t>ircuit </a:t>
+            </a:r>
+            <a:r>
+              <a:rPr lang="en-US" sz="2400" b="1" dirty="0"/>
+              <a:t>E</a:t>
+            </a:r>
+            <a:r>
+              <a:rPr lang="en-US" sz="2400" dirty="0"/>
+              <a:t>mphasis</a:t>
+            </a:r>
+          </a:p>
+          <a:p>
+            <a:pPr marL="285750" indent="-285750">
+              <a:buFont typeface="Arial" panose="020B0604020202020204" pitchFamily="34" charset="0"/>
+              <a:buChar char="•"/>
+            </a:pPr>
+            <a:r>
+              <a:rPr lang="en-US" sz="2400" dirty="0"/>
+              <a:t>Developed in 1973 by Laurence Nagel at UC Berkeley’s Electronics Research Laboratory</a:t>
+            </a:r>
+          </a:p>
+          <a:p>
+            <a:pPr marL="285750" indent="-285750">
+              <a:buFont typeface="Arial" panose="020B0604020202020204" pitchFamily="34" charset="0"/>
+              <a:buChar char="•"/>
+            </a:pPr>
+            <a:r>
+              <a:rPr lang="en-US" sz="2400" dirty="0"/>
+              <a:t>Dependent on user defined device models</a:t>
+            </a:r>
+          </a:p>
+          <a:p>
+            <a:pPr marL="285750" indent="-285750">
+              <a:buFont typeface="Arial" panose="020B0604020202020204" pitchFamily="34" charset="0"/>
+              <a:buChar char="•"/>
+            </a:pPr>
+            <a:endParaRPr lang="en-US" sz="2400" dirty="0"/>
+          </a:p>
+        </p:txBody>
+      </p:sp>
+      <p:pic>
+        <p:nvPicPr>
+          <p:cNvPr id="14" name="Picture 13">
+            <a:extLst>
+              <a:ext uri="{FF2B5EF4-FFF2-40B4-BE49-F238E27FC236}">
+                <a16:creationId xmlns:a16="http://schemas.microsoft.com/office/drawing/2014/main" id="{254B90CB-39BE-E90E-5803-3F8469592D68}"/>
+              </a:ext>
+            </a:extLst>
+          </p:cNvPr>
+          <p:cNvPicPr>
+            <a:picLocks noChangeAspect="1"/>
+          </p:cNvPicPr>
+          <p:nvPr/>
+        </p:nvPicPr>
+        <p:blipFill>
+          <a:blip r:embed="rId2"/>
+          <a:stretch>
+            <a:fillRect/>
+          </a:stretch>
+        </p:blipFill>
+        <p:spPr>
+          <a:xfrm>
+            <a:off x="1574050" y="2536492"/>
+            <a:ext cx="7772400" cy="3819858"/>
+          </a:xfrm>
+          <a:prstGeom prst="rect">
+            <a:avLst/>
+          </a:prstGeom>
+        </p:spPr>
+      </p:pic>
     </p:spTree>
     <p:extLst>
       <p:ext uri="{BB962C8B-B14F-4D97-AF65-F5344CB8AC3E}">
         <p14:creationId xmlns:p14="http://schemas.microsoft.com/office/powerpoint/2010/main" val="1667819663"/>
+      </p:ext>
+    </p:extLst>
+  </p:cSld>
+  <p:clrMapOvr>
+    <a:masterClrMapping/>
+  </p:clrMapOvr>
+</p:sld>
+</file>
+
+<file path=ppt/slides/slide20.xml><?xml version="1.0" encoding="utf-8"?>
+<p:sld xmlns:a="http://schemas.openxmlformats.org/drawingml/2006/main" xmlns:r="http://schemas.openxmlformats.org/officeDocument/2006/relationships" xmlns:p="http://schemas.openxmlformats.org/presentationml/2006/main">
+  <p:cSld>
+    <p:spTree>
+      <p:nvGrpSpPr>
+        <p:cNvPr id="1" name=""/>
+        <p:cNvGrpSpPr/>
+        <p:nvPr/>
+      </p:nvGrpSpPr>
+      <p:grpSpPr>
+        <a:xfrm>
+          <a:off x="0" y="0"/>
+          <a:ext cx="0" cy="0"/>
+          <a:chOff x="0" y="0"/>
+          <a:chExt cx="0" cy="0"/>
+        </a:xfrm>
+      </p:grpSpPr>
+      <p:sp>
+        <p:nvSpPr>
+          <p:cNvPr id="2" name="Title 1">
+            <a:extLst>
+              <a:ext uri="{FF2B5EF4-FFF2-40B4-BE49-F238E27FC236}">
+                <a16:creationId xmlns:a16="http://schemas.microsoft.com/office/drawing/2014/main" id="{7DAC99BE-1D8B-2566-004C-B51CDD471449}"/>
+              </a:ext>
+            </a:extLst>
+          </p:cNvPr>
+          <p:cNvSpPr>
+            <a:spLocks noGrp="1"/>
+          </p:cNvSpPr>
+          <p:nvPr>
+            <p:ph type="title"/>
+          </p:nvPr>
+        </p:nvSpPr>
+        <p:spPr/>
+        <p:txBody>
+          <a:bodyPr/>
+          <a:lstStyle/>
+          <a:p>
+            <a:endParaRPr lang="en-US"/>
+          </a:p>
+        </p:txBody>
+      </p:sp>
+      <p:sp>
+        <p:nvSpPr>
+          <p:cNvPr id="3" name="Date Placeholder 2">
+            <a:extLst>
+              <a:ext uri="{FF2B5EF4-FFF2-40B4-BE49-F238E27FC236}">
+                <a16:creationId xmlns:a16="http://schemas.microsoft.com/office/drawing/2014/main" id="{D10A7092-49D9-9700-EDD1-07114940260D}"/>
+              </a:ext>
+            </a:extLst>
+          </p:cNvPr>
+          <p:cNvSpPr>
+            <a:spLocks noGrp="1"/>
+          </p:cNvSpPr>
+          <p:nvPr>
+            <p:ph type="dt" sz="half" idx="10"/>
+          </p:nvPr>
+        </p:nvSpPr>
+        <p:spPr/>
+        <p:txBody>
+          <a:bodyPr/>
+          <a:lstStyle/>
+          <a:p>
+            <a:r>
+              <a:rPr lang="en-US"/>
+              <a:t>15/01/2026</a:t>
+            </a:r>
+          </a:p>
+        </p:txBody>
+      </p:sp>
+      <p:sp>
+        <p:nvSpPr>
+          <p:cNvPr id="4" name="Footer Placeholder 3">
+            <a:extLst>
+              <a:ext uri="{FF2B5EF4-FFF2-40B4-BE49-F238E27FC236}">
+                <a16:creationId xmlns:a16="http://schemas.microsoft.com/office/drawing/2014/main" id="{51FA5C09-973F-7844-5BDD-864BA759B1A5}"/>
+              </a:ext>
+            </a:extLst>
+          </p:cNvPr>
+          <p:cNvSpPr>
+            <a:spLocks noGrp="1"/>
+          </p:cNvSpPr>
+          <p:nvPr>
+            <p:ph type="ftr" sz="quarter" idx="11"/>
+          </p:nvPr>
+        </p:nvSpPr>
+        <p:spPr/>
+        <p:txBody>
+          <a:bodyPr/>
+          <a:lstStyle/>
+          <a:p>
+            <a:r>
+              <a:rPr lang="en-US"/>
+              <a:t>Stefan Cristi Zugravel, elettronica base, TPS lezione 2</a:t>
+            </a:r>
+          </a:p>
+        </p:txBody>
+      </p:sp>
+      <p:sp>
+        <p:nvSpPr>
+          <p:cNvPr id="5" name="Slide Number Placeholder 4">
+            <a:extLst>
+              <a:ext uri="{FF2B5EF4-FFF2-40B4-BE49-F238E27FC236}">
+                <a16:creationId xmlns:a16="http://schemas.microsoft.com/office/drawing/2014/main" id="{F2832859-73D6-2559-95E7-D76C571E72EB}"/>
+              </a:ext>
+            </a:extLst>
+          </p:cNvPr>
+          <p:cNvSpPr>
+            <a:spLocks noGrp="1"/>
+          </p:cNvSpPr>
+          <p:nvPr>
+            <p:ph type="sldNum" sz="quarter" idx="12"/>
+          </p:nvPr>
+        </p:nvSpPr>
+        <p:spPr/>
+        <p:txBody>
+          <a:bodyPr/>
+          <a:lstStyle/>
+          <a:p>
+            <a:fld id="{B7C12E76-5DE4-834B-BE10-AD31AA7B20EC}" type="slidenum">
+              <a:rPr lang="en-US" smtClean="0"/>
+              <a:t>20</a:t>
+            </a:fld>
+            <a:endParaRPr lang="en-US"/>
+          </a:p>
+        </p:txBody>
+      </p:sp>
+    </p:spTree>
+    <p:extLst>
+      <p:ext uri="{BB962C8B-B14F-4D97-AF65-F5344CB8AC3E}">
+        <p14:creationId xmlns:p14="http://schemas.microsoft.com/office/powerpoint/2010/main" val="1551418612"/>
       </p:ext>
     </p:extLst>
   </p:cSld>
@@ -4053,7 +6152,11 @@
           <a:bodyPr/>
           <a:lstStyle/>
           <a:p>
-            <a:endParaRPr lang="en-US"/>
+            <a:r>
+              <a:rPr lang="en-US" dirty="0" err="1"/>
+              <a:t>LTspice</a:t>
+            </a:r>
+            <a:endParaRPr lang="en-US" dirty="0"/>
           </a:p>
         </p:txBody>
       </p:sp>
@@ -4138,7 +6241,151 @@
               <a:rPr lang="en-US" smtClean="0"/>
               <a:t>3</a:t>
             </a:fld>
-            <a:endParaRPr lang="en-US"/>
+            <a:endParaRPr lang="en-US" dirty="0"/>
+          </a:p>
+        </p:txBody>
+      </p:sp>
+      <p:sp>
+        <p:nvSpPr>
+          <p:cNvPr id="7" name="TextBox 6">
+            <a:extLst>
+              <a:ext uri="{FF2B5EF4-FFF2-40B4-BE49-F238E27FC236}">
+                <a16:creationId xmlns:a16="http://schemas.microsoft.com/office/drawing/2014/main" id="{227AA2F8-2AB2-1080-3D17-5C92A231778F}"/>
+              </a:ext>
+            </a:extLst>
+          </p:cNvPr>
+          <p:cNvSpPr txBox="1"/>
+          <p:nvPr/>
+        </p:nvSpPr>
+        <p:spPr>
+          <a:xfrm>
+            <a:off x="588686" y="1073877"/>
+            <a:ext cx="10053917" cy="1200329"/>
+          </a:xfrm>
+          <a:prstGeom prst="rect">
+            <a:avLst/>
+          </a:prstGeom>
+          <a:noFill/>
+        </p:spPr>
+        <p:txBody>
+          <a:bodyPr wrap="square">
+            <a:spAutoFit/>
+          </a:bodyPr>
+          <a:lstStyle/>
+          <a:p>
+            <a:pPr marL="285750" indent="-285750">
+              <a:buFont typeface="Arial" panose="020B0604020202020204" pitchFamily="34" charset="0"/>
+              <a:buChar char="•"/>
+            </a:pPr>
+            <a:r>
+              <a:rPr lang="en-US" sz="2400" dirty="0"/>
+              <a:t>Developed in 1998 at </a:t>
+            </a:r>
+            <a:r>
+              <a:rPr lang="en-US" sz="2400" b="1" dirty="0"/>
+              <a:t>Linear Technology Corporation</a:t>
+            </a:r>
+          </a:p>
+          <a:p>
+            <a:pPr marL="285750" indent="-285750">
+              <a:buFont typeface="Arial" panose="020B0604020202020204" pitchFamily="34" charset="0"/>
+              <a:buChar char="•"/>
+            </a:pPr>
+            <a:r>
+              <a:rPr lang="en-US" sz="2400" dirty="0"/>
+              <a:t>GUI, simulator, and schematic -&gt; netlist for SPICE</a:t>
+            </a:r>
+          </a:p>
+          <a:p>
+            <a:pPr marL="285750" indent="-285750">
+              <a:buFont typeface="Arial" panose="020B0604020202020204" pitchFamily="34" charset="0"/>
+              <a:buChar char="•"/>
+            </a:pPr>
+            <a:r>
+              <a:rPr lang="en-US" sz="2400" dirty="0"/>
+              <a:t>FREE and comes with tons of models</a:t>
+            </a:r>
+          </a:p>
+        </p:txBody>
+      </p:sp>
+      <p:pic>
+        <p:nvPicPr>
+          <p:cNvPr id="8" name="Picture 7">
+            <a:extLst>
+              <a:ext uri="{FF2B5EF4-FFF2-40B4-BE49-F238E27FC236}">
+                <a16:creationId xmlns:a16="http://schemas.microsoft.com/office/drawing/2014/main" id="{682BDA9F-121F-4DC8-AF94-662BAFB0E784}"/>
+              </a:ext>
+            </a:extLst>
+          </p:cNvPr>
+          <p:cNvPicPr>
+            <a:picLocks noChangeAspect="1"/>
+          </p:cNvPicPr>
+          <p:nvPr/>
+        </p:nvPicPr>
+        <p:blipFill>
+          <a:blip r:embed="rId2"/>
+          <a:stretch>
+            <a:fillRect/>
+          </a:stretch>
+        </p:blipFill>
+        <p:spPr>
+          <a:xfrm>
+            <a:off x="979834" y="2348753"/>
+            <a:ext cx="10206929" cy="3435370"/>
+          </a:xfrm>
+          <a:prstGeom prst="rect">
+            <a:avLst/>
+          </a:prstGeom>
+        </p:spPr>
+      </p:pic>
+      <p:sp>
+        <p:nvSpPr>
+          <p:cNvPr id="10" name="TextBox 9">
+            <a:extLst>
+              <a:ext uri="{FF2B5EF4-FFF2-40B4-BE49-F238E27FC236}">
+                <a16:creationId xmlns:a16="http://schemas.microsoft.com/office/drawing/2014/main" id="{F7AAE302-AC8D-229B-3CF6-FF0E74EF21CE}"/>
+              </a:ext>
+            </a:extLst>
+          </p:cNvPr>
+          <p:cNvSpPr txBox="1"/>
+          <p:nvPr/>
+        </p:nvSpPr>
+        <p:spPr>
+          <a:xfrm>
+            <a:off x="588686" y="5627837"/>
+            <a:ext cx="10814420" cy="461665"/>
+          </a:xfrm>
+          <a:prstGeom prst="rect">
+            <a:avLst/>
+          </a:prstGeom>
+          <a:noFill/>
+        </p:spPr>
+        <p:txBody>
+          <a:bodyPr wrap="square">
+            <a:spAutoFit/>
+          </a:bodyPr>
+          <a:lstStyle/>
+          <a:p>
+            <a:pPr marL="342900" indent="-342900">
+              <a:buFont typeface="Arial" panose="020B0604020202020204" pitchFamily="34" charset="0"/>
+              <a:buChar char="•"/>
+            </a:pPr>
+            <a:r>
+              <a:rPr lang="en-US" sz="2400" b="1" dirty="0"/>
+              <a:t>Linear Technology </a:t>
+            </a:r>
+            <a:r>
+              <a:rPr lang="en-US" sz="2400" dirty="0"/>
+              <a:t>was acquired by </a:t>
+            </a:r>
+            <a:r>
+              <a:rPr lang="en-US" sz="2400" b="1" dirty="0"/>
+              <a:t>Analog Devices </a:t>
+            </a:r>
+            <a:r>
+              <a:rPr lang="en-US" sz="2400" dirty="0"/>
+              <a:t>in 2017</a:t>
+            </a:r>
           </a:p>
         </p:txBody>
       </p:sp>
@@ -4177,7 +6424,7 @@
           <p:cNvPr id="2" name="Title 1">
             <a:extLst>
               <a:ext uri="{FF2B5EF4-FFF2-40B4-BE49-F238E27FC236}">
-                <a16:creationId xmlns:a16="http://schemas.microsoft.com/office/drawing/2014/main" id="{2AA1E47E-C9F1-4473-EF3A-12ACF17608D7}"/>
+                <a16:creationId xmlns:a16="http://schemas.microsoft.com/office/drawing/2014/main" id="{A5E925E4-6061-50DE-6730-C1718B693D99}"/>
               </a:ext>
             </a:extLst>
           </p:cNvPr>
@@ -4190,10 +6437,15 @@
         </p:nvSpPr>
         <p:spPr/>
         <p:txBody>
-          <a:bodyPr/>
-          <a:lstStyle/>
-          <a:p>
-            <a:endParaRPr lang="en-US"/>
+          <a:bodyPr>
+            <a:normAutofit/>
+          </a:bodyPr>
+          <a:lstStyle/>
+          <a:p>
+            <a:r>
+              <a:rPr lang="en-US" dirty="0"/>
+              <a:t>What Should My Circuit Do?</a:t>
+            </a:r>
           </a:p>
         </p:txBody>
       </p:sp>
@@ -4202,7 +6454,7 @@
           <p:cNvPr id="3" name="Date Placeholder 2">
             <a:extLst>
               <a:ext uri="{FF2B5EF4-FFF2-40B4-BE49-F238E27FC236}">
-                <a16:creationId xmlns:a16="http://schemas.microsoft.com/office/drawing/2014/main" id="{EB86BCD4-44AE-0281-1B1D-72B9CD78192C}"/>
+                <a16:creationId xmlns:a16="http://schemas.microsoft.com/office/drawing/2014/main" id="{98D89874-65F9-2FC9-5AA2-39F4016270CA}"/>
               </a:ext>
             </a:extLst>
           </p:cNvPr>
@@ -4230,7 +6482,7 @@
           <p:cNvPr id="4" name="Footer Placeholder 3">
             <a:extLst>
               <a:ext uri="{FF2B5EF4-FFF2-40B4-BE49-F238E27FC236}">
-                <a16:creationId xmlns:a16="http://schemas.microsoft.com/office/drawing/2014/main" id="{3A3D8BD6-9020-3566-C328-14E09DCF8324}"/>
+                <a16:creationId xmlns:a16="http://schemas.microsoft.com/office/drawing/2014/main" id="{03BC3A06-E02D-1FDF-31D3-6C4F65F2B71B}"/>
               </a:ext>
             </a:extLst>
           </p:cNvPr>
@@ -4258,7 +6510,7 @@
           <p:cNvPr id="5" name="Slide Number Placeholder 4">
             <a:extLst>
               <a:ext uri="{FF2B5EF4-FFF2-40B4-BE49-F238E27FC236}">
-                <a16:creationId xmlns:a16="http://schemas.microsoft.com/office/drawing/2014/main" id="{1B8AD1A5-F549-1C27-91F8-0EDD5C616AA2}"/>
+                <a16:creationId xmlns:a16="http://schemas.microsoft.com/office/drawing/2014/main" id="{ABB6EF5B-C488-CE03-14EF-D728CAF03984}"/>
               </a:ext>
             </a:extLst>
           </p:cNvPr>
@@ -4282,10 +6534,90 @@
           </a:p>
         </p:txBody>
       </p:sp>
+      <p:sp>
+        <p:nvSpPr>
+          <p:cNvPr id="7" name="TextBox 6">
+            <a:extLst>
+              <a:ext uri="{FF2B5EF4-FFF2-40B4-BE49-F238E27FC236}">
+                <a16:creationId xmlns:a16="http://schemas.microsoft.com/office/drawing/2014/main" id="{53A7C92F-024E-888E-6F82-B793892332B9}"/>
+              </a:ext>
+            </a:extLst>
+          </p:cNvPr>
+          <p:cNvSpPr txBox="1"/>
+          <p:nvPr/>
+        </p:nvSpPr>
+        <p:spPr>
+          <a:xfrm>
+            <a:off x="1905000" y="1696424"/>
+            <a:ext cx="8382000" cy="2246769"/>
+          </a:xfrm>
+          <a:prstGeom prst="rect">
+            <a:avLst/>
+          </a:prstGeom>
+          <a:noFill/>
+        </p:spPr>
+        <p:txBody>
+          <a:bodyPr wrap="square">
+            <a:spAutoFit/>
+          </a:bodyPr>
+          <a:lstStyle/>
+          <a:p>
+            <a:pPr marL="285750" indent="-285750">
+              <a:buFont typeface="Arial" panose="020B0604020202020204" pitchFamily="34" charset="0"/>
+              <a:buChar char="•"/>
+            </a:pPr>
+            <a:r>
+              <a:rPr lang="en-US" dirty="0"/>
+              <a:t>The very first step to any simulation is to </a:t>
+            </a:r>
+            <a:r>
+              <a:rPr lang="en-US" b="1" dirty="0"/>
+              <a:t>know how your circuit should behave</a:t>
+            </a:r>
+            <a:r>
+              <a:rPr lang="en-US" dirty="0"/>
+              <a:t>.</a:t>
+            </a:r>
+          </a:p>
+          <a:p>
+            <a:pPr marL="285750" indent="-285750">
+              <a:buFont typeface="Arial" panose="020B0604020202020204" pitchFamily="34" charset="0"/>
+              <a:buChar char="•"/>
+            </a:pPr>
+            <a:r>
+              <a:rPr lang="en-US" dirty="0"/>
+              <a:t>Simulation is a verification tool NOT A CIRCUIT SOLVER.</a:t>
+            </a:r>
+          </a:p>
+          <a:p>
+            <a:endParaRPr lang="en-US" dirty="0"/>
+          </a:p>
+          <a:p>
+            <a:endParaRPr lang="en-US" dirty="0"/>
+          </a:p>
+          <a:p>
+            <a:endParaRPr lang="en-US" dirty="0"/>
+          </a:p>
+          <a:p>
+            <a:endParaRPr lang="en-US" dirty="0"/>
+          </a:p>
+          <a:p>
+            <a:pPr algn="ctr"/>
+            <a:r>
+              <a:rPr lang="en-US" sz="3200" b="1" dirty="0">
+                <a:solidFill>
+                  <a:srgbClr val="FF0000"/>
+                </a:solidFill>
+              </a:rPr>
+              <a:t>So how should this circuit behave?</a:t>
+            </a:r>
+          </a:p>
+        </p:txBody>
+      </p:sp>
     </p:spTree>
     <p:extLst>
       <p:ext uri="{BB962C8B-B14F-4D97-AF65-F5344CB8AC3E}">
-        <p14:creationId xmlns:p14="http://schemas.microsoft.com/office/powerpoint/2010/main" val="2124086413"/>
+        <p14:creationId xmlns:p14="http://schemas.microsoft.com/office/powerpoint/2010/main" val="2391681512"/>
       </p:ext>
     </p:extLst>
   </p:cSld>
@@ -4317,7 +6649,7 @@
           <p:cNvPr id="2" name="Title 1">
             <a:extLst>
               <a:ext uri="{FF2B5EF4-FFF2-40B4-BE49-F238E27FC236}">
-                <a16:creationId xmlns:a16="http://schemas.microsoft.com/office/drawing/2014/main" id="{D125CC35-D1B5-0DDB-6E74-E4D1DECBBE21}"/>
+                <a16:creationId xmlns:a16="http://schemas.microsoft.com/office/drawing/2014/main" id="{2AA1E47E-C9F1-4473-EF3A-12ACF17608D7}"/>
               </a:ext>
             </a:extLst>
           </p:cNvPr>
@@ -4333,7 +6665,10 @@
           <a:bodyPr/>
           <a:lstStyle/>
           <a:p>
-            <a:endParaRPr lang="en-US"/>
+            <a:r>
+              <a:rPr lang="en-US" dirty="0"/>
+              <a:t>Getting Started</a:t>
+            </a:r>
           </a:p>
         </p:txBody>
       </p:sp>
@@ -4342,7 +6677,7 @@
           <p:cNvPr id="3" name="Date Placeholder 2">
             <a:extLst>
               <a:ext uri="{FF2B5EF4-FFF2-40B4-BE49-F238E27FC236}">
-                <a16:creationId xmlns:a16="http://schemas.microsoft.com/office/drawing/2014/main" id="{653AA82B-873C-BA3A-71EE-25CBED7CD110}"/>
+                <a16:creationId xmlns:a16="http://schemas.microsoft.com/office/drawing/2014/main" id="{EB86BCD4-44AE-0281-1B1D-72B9CD78192C}"/>
               </a:ext>
             </a:extLst>
           </p:cNvPr>
@@ -4370,7 +6705,7 @@
           <p:cNvPr id="4" name="Footer Placeholder 3">
             <a:extLst>
               <a:ext uri="{FF2B5EF4-FFF2-40B4-BE49-F238E27FC236}">
-                <a16:creationId xmlns:a16="http://schemas.microsoft.com/office/drawing/2014/main" id="{A5307709-A996-F678-8735-0D17F84602AE}"/>
+                <a16:creationId xmlns:a16="http://schemas.microsoft.com/office/drawing/2014/main" id="{3A3D8BD6-9020-3566-C328-14E09DCF8324}"/>
               </a:ext>
             </a:extLst>
           </p:cNvPr>
@@ -4398,7 +6733,7 @@
           <p:cNvPr id="5" name="Slide Number Placeholder 4">
             <a:extLst>
               <a:ext uri="{FF2B5EF4-FFF2-40B4-BE49-F238E27FC236}">
-                <a16:creationId xmlns:a16="http://schemas.microsoft.com/office/drawing/2014/main" id="{D1EC889A-6888-B49A-51DD-597956B147A5}"/>
+                <a16:creationId xmlns:a16="http://schemas.microsoft.com/office/drawing/2014/main" id="{1B8AD1A5-F549-1C27-91F8-0EDD5C616AA2}"/>
               </a:ext>
             </a:extLst>
           </p:cNvPr>
@@ -4422,10 +6757,40 @@
           </a:p>
         </p:txBody>
       </p:sp>
+      <p:pic>
+        <p:nvPicPr>
+          <p:cNvPr id="7" name="Picture 6">
+            <a:extLst>
+              <a:ext uri="{FF2B5EF4-FFF2-40B4-BE49-F238E27FC236}">
+                <a16:creationId xmlns:a16="http://schemas.microsoft.com/office/drawing/2014/main" id="{1DAC7986-B314-62C4-F4CD-E10068187C53}"/>
+              </a:ext>
+            </a:extLst>
+          </p:cNvPr>
+          <p:cNvPicPr>
+            <a:picLocks noChangeAspect="1"/>
+          </p:cNvPicPr>
+          <p:nvPr/>
+        </p:nvPicPr>
+        <p:blipFill>
+          <a:blip r:embed="rId2"/>
+          <a:stretch>
+            <a:fillRect/>
+          </a:stretch>
+        </p:blipFill>
+        <p:spPr>
+          <a:xfrm>
+            <a:off x="922448" y="1255058"/>
+            <a:ext cx="9720155" cy="4833900"/>
+          </a:xfrm>
+          <a:prstGeom prst="rect">
+            <a:avLst/>
+          </a:prstGeom>
+        </p:spPr>
+      </p:pic>
     </p:spTree>
     <p:extLst>
       <p:ext uri="{BB962C8B-B14F-4D97-AF65-F5344CB8AC3E}">
-        <p14:creationId xmlns:p14="http://schemas.microsoft.com/office/powerpoint/2010/main" val="2013613908"/>
+        <p14:creationId xmlns:p14="http://schemas.microsoft.com/office/powerpoint/2010/main" val="2124086413"/>
       </p:ext>
     </p:extLst>
   </p:cSld>
@@ -4473,7 +6838,10 @@
           <a:bodyPr/>
           <a:lstStyle/>
           <a:p>
-            <a:endParaRPr lang="en-US"/>
+            <a:r>
+              <a:rPr lang="en-US" dirty="0"/>
+              <a:t>Net Labels</a:t>
+            </a:r>
           </a:p>
         </p:txBody>
       </p:sp>
@@ -4559,6 +6927,125 @@
               <a:t>6</a:t>
             </a:fld>
             <a:endParaRPr lang="en-US"/>
+          </a:p>
+        </p:txBody>
+      </p:sp>
+      <p:pic>
+        <p:nvPicPr>
+          <p:cNvPr id="6" name="Picture 5">
+            <a:extLst>
+              <a:ext uri="{FF2B5EF4-FFF2-40B4-BE49-F238E27FC236}">
+                <a16:creationId xmlns:a16="http://schemas.microsoft.com/office/drawing/2014/main" id="{F537652C-1826-9DF6-919D-5CDAACC491DA}"/>
+              </a:ext>
+            </a:extLst>
+          </p:cNvPr>
+          <p:cNvPicPr>
+            <a:picLocks noChangeAspect="1"/>
+          </p:cNvPicPr>
+          <p:nvPr/>
+        </p:nvPicPr>
+        <p:blipFill>
+          <a:blip r:embed="rId2"/>
+          <a:stretch>
+            <a:fillRect/>
+          </a:stretch>
+        </p:blipFill>
+        <p:spPr>
+          <a:xfrm>
+            <a:off x="1313425" y="1623357"/>
+            <a:ext cx="672353" cy="644338"/>
+          </a:xfrm>
+          <a:prstGeom prst="rect">
+            <a:avLst/>
+          </a:prstGeom>
+        </p:spPr>
+      </p:pic>
+      <p:pic>
+        <p:nvPicPr>
+          <p:cNvPr id="7" name="Picture 6">
+            <a:extLst>
+              <a:ext uri="{FF2B5EF4-FFF2-40B4-BE49-F238E27FC236}">
+                <a16:creationId xmlns:a16="http://schemas.microsoft.com/office/drawing/2014/main" id="{30C064BF-0D39-F7B6-C7B2-571DD12643DF}"/>
+              </a:ext>
+            </a:extLst>
+          </p:cNvPr>
+          <p:cNvPicPr>
+            <a:picLocks noChangeAspect="1"/>
+          </p:cNvPicPr>
+          <p:nvPr/>
+        </p:nvPicPr>
+        <p:blipFill>
+          <a:blip r:embed="rId3"/>
+          <a:stretch>
+            <a:fillRect/>
+          </a:stretch>
+        </p:blipFill>
+        <p:spPr>
+          <a:xfrm>
+            <a:off x="972670" y="2402540"/>
+            <a:ext cx="1353864" cy="3818965"/>
+          </a:xfrm>
+          <a:prstGeom prst="rect">
+            <a:avLst/>
+          </a:prstGeom>
+        </p:spPr>
+      </p:pic>
+      <p:sp>
+        <p:nvSpPr>
+          <p:cNvPr id="9" name="TextBox 8">
+            <a:extLst>
+              <a:ext uri="{FF2B5EF4-FFF2-40B4-BE49-F238E27FC236}">
+                <a16:creationId xmlns:a16="http://schemas.microsoft.com/office/drawing/2014/main" id="{F3D83628-C589-E05D-35C6-C2005D54AA5E}"/>
+              </a:ext>
+            </a:extLst>
+          </p:cNvPr>
+          <p:cNvSpPr txBox="1"/>
+          <p:nvPr/>
+        </p:nvSpPr>
+        <p:spPr>
+          <a:xfrm>
+            <a:off x="3056966" y="1482865"/>
+            <a:ext cx="8162364" cy="1569660"/>
+          </a:xfrm>
+          <a:prstGeom prst="rect">
+            <a:avLst/>
+          </a:prstGeom>
+          <a:noFill/>
+        </p:spPr>
+        <p:txBody>
+          <a:bodyPr wrap="square">
+            <a:spAutoFit/>
+          </a:bodyPr>
+          <a:lstStyle/>
+          <a:p>
+            <a:pPr marL="285750" indent="-285750">
+              <a:buFont typeface="Arial" panose="020B0604020202020204" pitchFamily="34" charset="0"/>
+              <a:buChar char="•"/>
+            </a:pPr>
+            <a:r>
+              <a:rPr lang="en-US" sz="2400" dirty="0"/>
+              <a:t>By labeling nets you can avoid a giant mess of wires.</a:t>
+            </a:r>
+          </a:p>
+          <a:p>
+            <a:pPr marL="285750" indent="-285750">
+              <a:buFont typeface="Arial" panose="020B0604020202020204" pitchFamily="34" charset="0"/>
+              <a:buChar char="•"/>
+            </a:pPr>
+            <a:r>
+              <a:rPr lang="en-US" sz="2400" dirty="0"/>
+              <a:t>Always use these for at least your power supplies.</a:t>
+            </a:r>
+          </a:p>
+          <a:p>
+            <a:pPr marL="285750" indent="-285750">
+              <a:buFont typeface="Arial" panose="020B0604020202020204" pitchFamily="34" charset="0"/>
+              <a:buChar char="•"/>
+            </a:pPr>
+            <a:r>
+              <a:rPr lang="en-US" sz="2400" dirty="0"/>
+              <a:t>When you start making large circuits, your power supplies will provide energy all over your schematic.</a:t>
+            </a:r>
           </a:p>
         </p:txBody>
       </p:sp>
@@ -4597,7 +7084,7 @@
           <p:cNvPr id="2" name="Title 1">
             <a:extLst>
               <a:ext uri="{FF2B5EF4-FFF2-40B4-BE49-F238E27FC236}">
-                <a16:creationId xmlns:a16="http://schemas.microsoft.com/office/drawing/2014/main" id="{CDB68023-AF5A-4E6D-4418-750D164001F5}"/>
+                <a16:creationId xmlns:a16="http://schemas.microsoft.com/office/drawing/2014/main" id="{D125CC35-D1B5-0DDB-6E74-E4D1DECBBE21}"/>
               </a:ext>
             </a:extLst>
           </p:cNvPr>
@@ -4613,7 +7100,10 @@
           <a:bodyPr/>
           <a:lstStyle/>
           <a:p>
-            <a:endParaRPr lang="en-US"/>
+            <a:r>
+              <a:rPr lang="en-US" dirty="0"/>
+              <a:t>Component to Menu Item Matchup</a:t>
+            </a:r>
           </a:p>
         </p:txBody>
       </p:sp>
@@ -4622,7 +7112,7 @@
           <p:cNvPr id="3" name="Date Placeholder 2">
             <a:extLst>
               <a:ext uri="{FF2B5EF4-FFF2-40B4-BE49-F238E27FC236}">
-                <a16:creationId xmlns:a16="http://schemas.microsoft.com/office/drawing/2014/main" id="{6199AF3E-D271-0D0E-8F8F-AC42B117CCF0}"/>
+                <a16:creationId xmlns:a16="http://schemas.microsoft.com/office/drawing/2014/main" id="{653AA82B-873C-BA3A-71EE-25CBED7CD110}"/>
               </a:ext>
             </a:extLst>
           </p:cNvPr>
@@ -4650,7 +7140,7 @@
           <p:cNvPr id="4" name="Footer Placeholder 3">
             <a:extLst>
               <a:ext uri="{FF2B5EF4-FFF2-40B4-BE49-F238E27FC236}">
-                <a16:creationId xmlns:a16="http://schemas.microsoft.com/office/drawing/2014/main" id="{1E675BE5-0B0D-BB52-FF35-4693413BB2E7}"/>
+                <a16:creationId xmlns:a16="http://schemas.microsoft.com/office/drawing/2014/main" id="{A5307709-A996-F678-8735-0D17F84602AE}"/>
               </a:ext>
             </a:extLst>
           </p:cNvPr>
@@ -4678,7 +7168,7 @@
           <p:cNvPr id="5" name="Slide Number Placeholder 4">
             <a:extLst>
               <a:ext uri="{FF2B5EF4-FFF2-40B4-BE49-F238E27FC236}">
-                <a16:creationId xmlns:a16="http://schemas.microsoft.com/office/drawing/2014/main" id="{4E042B2F-FDB6-AF53-7B37-5DD5F6FC5F92}"/>
+                <a16:creationId xmlns:a16="http://schemas.microsoft.com/office/drawing/2014/main" id="{D1EC889A-6888-B49A-51DD-597956B147A5}"/>
               </a:ext>
             </a:extLst>
           </p:cNvPr>
@@ -4702,10 +7192,554 @@
           </a:p>
         </p:txBody>
       </p:sp>
+      <p:pic>
+        <p:nvPicPr>
+          <p:cNvPr id="6" name="Picture 5">
+            <a:extLst>
+              <a:ext uri="{FF2B5EF4-FFF2-40B4-BE49-F238E27FC236}">
+                <a16:creationId xmlns:a16="http://schemas.microsoft.com/office/drawing/2014/main" id="{B8C7EA7D-EBB0-B65B-9CC8-A86433CE5151}"/>
+              </a:ext>
+            </a:extLst>
+          </p:cNvPr>
+          <p:cNvPicPr>
+            <a:picLocks noChangeAspect="1"/>
+          </p:cNvPicPr>
+          <p:nvPr/>
+        </p:nvPicPr>
+        <p:blipFill>
+          <a:blip r:embed="rId2"/>
+          <a:stretch>
+            <a:fillRect/>
+          </a:stretch>
+        </p:blipFill>
+        <p:spPr>
+          <a:xfrm>
+            <a:off x="1670422" y="1185334"/>
+            <a:ext cx="8825753" cy="4688924"/>
+          </a:xfrm>
+          <a:prstGeom prst="rect">
+            <a:avLst/>
+          </a:prstGeom>
+        </p:spPr>
+      </p:pic>
     </p:spTree>
     <p:extLst>
       <p:ext uri="{BB962C8B-B14F-4D97-AF65-F5344CB8AC3E}">
-        <p14:creationId xmlns:p14="http://schemas.microsoft.com/office/powerpoint/2010/main" val="2961610399"/>
+        <p14:creationId xmlns:p14="http://schemas.microsoft.com/office/powerpoint/2010/main" val="2013613908"/>
+      </p:ext>
+    </p:extLst>
+  </p:cSld>
+  <p:clrMapOvr>
+    <a:masterClrMapping/>
+  </p:clrMapOvr>
+</p:sld>
+</file>
+
+<file path=ppt/slides/slide8.xml><?xml version="1.0" encoding="utf-8"?>
+<p:sld xmlns:a="http://schemas.openxmlformats.org/drawingml/2006/main" xmlns:r="http://schemas.openxmlformats.org/officeDocument/2006/relationships" xmlns:p="http://schemas.openxmlformats.org/presentationml/2006/main">
+  <p:cSld>
+    <p:spTree>
+      <p:nvGrpSpPr>
+        <p:cNvPr id="1" name=""/>
+        <p:cNvGrpSpPr/>
+        <p:nvPr/>
+      </p:nvGrpSpPr>
+      <p:grpSpPr>
+        <a:xfrm>
+          <a:off x="0" y="0"/>
+          <a:ext cx="0" cy="0"/>
+          <a:chOff x="0" y="0"/>
+          <a:chExt cx="0" cy="0"/>
+        </a:xfrm>
+      </p:grpSpPr>
+      <p:sp>
+        <p:nvSpPr>
+          <p:cNvPr id="2" name="Title 1">
+            <a:extLst>
+              <a:ext uri="{FF2B5EF4-FFF2-40B4-BE49-F238E27FC236}">
+                <a16:creationId xmlns:a16="http://schemas.microsoft.com/office/drawing/2014/main" id="{D172BD6A-5412-87D7-277C-62E96C04791F}"/>
+              </a:ext>
+            </a:extLst>
+          </p:cNvPr>
+          <p:cNvSpPr>
+            <a:spLocks noGrp="1"/>
+          </p:cNvSpPr>
+          <p:nvPr>
+            <p:ph type="title"/>
+          </p:nvPr>
+        </p:nvSpPr>
+        <p:spPr/>
+        <p:txBody>
+          <a:bodyPr>
+            <a:normAutofit/>
+          </a:bodyPr>
+          <a:lstStyle/>
+          <a:p>
+            <a:r>
+              <a:rPr lang="en-US" dirty="0"/>
+              <a:t>Simulation: DC Operating Point Analysis (.op)</a:t>
+            </a:r>
+          </a:p>
+        </p:txBody>
+      </p:sp>
+      <p:sp>
+        <p:nvSpPr>
+          <p:cNvPr id="3" name="Date Placeholder 2">
+            <a:extLst>
+              <a:ext uri="{FF2B5EF4-FFF2-40B4-BE49-F238E27FC236}">
+                <a16:creationId xmlns:a16="http://schemas.microsoft.com/office/drawing/2014/main" id="{A4319888-BA3D-DAD4-1C67-5DA4A8ACB0FD}"/>
+              </a:ext>
+            </a:extLst>
+          </p:cNvPr>
+          <p:cNvSpPr>
+            <a:spLocks noGrp="1"/>
+          </p:cNvSpPr>
+          <p:nvPr>
+            <p:ph type="dt" sz="half" idx="10"/>
+          </p:nvPr>
+        </p:nvSpPr>
+        <p:spPr/>
+        <p:txBody>
+          <a:bodyPr/>
+          <a:lstStyle/>
+          <a:p>
+            <a:r>
+              <a:rPr lang="en-US"/>
+              <a:t>15/01/2026</a:t>
+            </a:r>
+          </a:p>
+        </p:txBody>
+      </p:sp>
+      <p:sp>
+        <p:nvSpPr>
+          <p:cNvPr id="4" name="Footer Placeholder 3">
+            <a:extLst>
+              <a:ext uri="{FF2B5EF4-FFF2-40B4-BE49-F238E27FC236}">
+                <a16:creationId xmlns:a16="http://schemas.microsoft.com/office/drawing/2014/main" id="{02F3FE1B-DD3B-7112-A19F-9B35C28C2452}"/>
+              </a:ext>
+            </a:extLst>
+          </p:cNvPr>
+          <p:cNvSpPr>
+            <a:spLocks noGrp="1"/>
+          </p:cNvSpPr>
+          <p:nvPr>
+            <p:ph type="ftr" sz="quarter" idx="11"/>
+          </p:nvPr>
+        </p:nvSpPr>
+        <p:spPr/>
+        <p:txBody>
+          <a:bodyPr/>
+          <a:lstStyle/>
+          <a:p>
+            <a:r>
+              <a:rPr lang="en-US"/>
+              <a:t>Stefan Cristi Zugravel, elettronica base, TPS lezione 2</a:t>
+            </a:r>
+          </a:p>
+        </p:txBody>
+      </p:sp>
+      <p:sp>
+        <p:nvSpPr>
+          <p:cNvPr id="5" name="Slide Number Placeholder 4">
+            <a:extLst>
+              <a:ext uri="{FF2B5EF4-FFF2-40B4-BE49-F238E27FC236}">
+                <a16:creationId xmlns:a16="http://schemas.microsoft.com/office/drawing/2014/main" id="{3B68B4F2-5C21-2734-A098-4AD951767B0B}"/>
+              </a:ext>
+            </a:extLst>
+          </p:cNvPr>
+          <p:cNvSpPr>
+            <a:spLocks noGrp="1"/>
+          </p:cNvSpPr>
+          <p:nvPr>
+            <p:ph type="sldNum" sz="quarter" idx="12"/>
+          </p:nvPr>
+        </p:nvSpPr>
+        <p:spPr/>
+        <p:txBody>
+          <a:bodyPr/>
+          <a:lstStyle/>
+          <a:p>
+            <a:fld id="{B7C12E76-5DE4-834B-BE10-AD31AA7B20EC}" type="slidenum">
+              <a:rPr lang="en-US" smtClean="0"/>
+              <a:t>8</a:t>
+            </a:fld>
+            <a:endParaRPr lang="en-US"/>
+          </a:p>
+        </p:txBody>
+      </p:sp>
+      <p:sp>
+        <p:nvSpPr>
+          <p:cNvPr id="7" name="TextBox 6">
+            <a:extLst>
+              <a:ext uri="{FF2B5EF4-FFF2-40B4-BE49-F238E27FC236}">
+                <a16:creationId xmlns:a16="http://schemas.microsoft.com/office/drawing/2014/main" id="{F15D4F82-ABA8-B0B8-8130-4C0BBE831FE3}"/>
+              </a:ext>
+            </a:extLst>
+          </p:cNvPr>
+          <p:cNvSpPr txBox="1"/>
+          <p:nvPr/>
+        </p:nvSpPr>
+        <p:spPr>
+          <a:xfrm>
+            <a:off x="177798" y="1185334"/>
+            <a:ext cx="11836404" cy="830997"/>
+          </a:xfrm>
+          <a:prstGeom prst="rect">
+            <a:avLst/>
+          </a:prstGeom>
+          <a:noFill/>
+        </p:spPr>
+        <p:txBody>
+          <a:bodyPr wrap="square">
+            <a:spAutoFit/>
+          </a:bodyPr>
+          <a:lstStyle/>
+          <a:p>
+            <a:r>
+              <a:rPr lang="en-US" sz="2400" dirty="0"/>
+              <a:t>“The DC operating point analysis calculates the </a:t>
+            </a:r>
+            <a:r>
+              <a:rPr lang="en-US" sz="2400" b="1" dirty="0"/>
+              <a:t>DC voltage </a:t>
+            </a:r>
+            <a:r>
+              <a:rPr lang="en-US" sz="2400" dirty="0"/>
+              <a:t>and current of each node in the </a:t>
+            </a:r>
+            <a:r>
+              <a:rPr lang="en-US" sz="2400" b="1" dirty="0"/>
+              <a:t>steady state </a:t>
+            </a:r>
+            <a:r>
+              <a:rPr lang="en-US" sz="2400" dirty="0"/>
+              <a:t>of the electronic circuit.”</a:t>
+            </a:r>
+          </a:p>
+        </p:txBody>
+      </p:sp>
+    </p:spTree>
+    <p:extLst>
+      <p:ext uri="{BB962C8B-B14F-4D97-AF65-F5344CB8AC3E}">
+        <p14:creationId xmlns:p14="http://schemas.microsoft.com/office/powerpoint/2010/main" val="3302210589"/>
+      </p:ext>
+    </p:extLst>
+  </p:cSld>
+  <p:clrMapOvr>
+    <a:masterClrMapping/>
+  </p:clrMapOvr>
+</p:sld>
+</file>
+
+<file path=ppt/slides/slide9.xml><?xml version="1.0" encoding="utf-8"?>
+<p:sld xmlns:a="http://schemas.openxmlformats.org/drawingml/2006/main" xmlns:r="http://schemas.openxmlformats.org/officeDocument/2006/relationships" xmlns:p="http://schemas.openxmlformats.org/presentationml/2006/main">
+  <p:cSld>
+    <p:spTree>
+      <p:nvGrpSpPr>
+        <p:cNvPr id="1" name=""/>
+        <p:cNvGrpSpPr/>
+        <p:nvPr/>
+      </p:nvGrpSpPr>
+      <p:grpSpPr>
+        <a:xfrm>
+          <a:off x="0" y="0"/>
+          <a:ext cx="0" cy="0"/>
+          <a:chOff x="0" y="0"/>
+          <a:chExt cx="0" cy="0"/>
+        </a:xfrm>
+      </p:grpSpPr>
+      <p:sp>
+        <p:nvSpPr>
+          <p:cNvPr id="2" name="Title 1">
+            <a:extLst>
+              <a:ext uri="{FF2B5EF4-FFF2-40B4-BE49-F238E27FC236}">
+                <a16:creationId xmlns:a16="http://schemas.microsoft.com/office/drawing/2014/main" id="{19D4FFBF-4850-DF7A-9684-44B15D9B2C68}"/>
+              </a:ext>
+            </a:extLst>
+          </p:cNvPr>
+          <p:cNvSpPr>
+            <a:spLocks noGrp="1"/>
+          </p:cNvSpPr>
+          <p:nvPr>
+            <p:ph type="title"/>
+          </p:nvPr>
+        </p:nvSpPr>
+        <p:spPr/>
+        <p:txBody>
+          <a:bodyPr>
+            <a:normAutofit/>
+          </a:bodyPr>
+          <a:lstStyle/>
+          <a:p>
+            <a:r>
+              <a:rPr lang="en-US" dirty="0"/>
+              <a:t>Simulation: Transient (.</a:t>
+            </a:r>
+            <a:r>
+              <a:rPr lang="en-US" dirty="0" err="1"/>
+              <a:t>tran</a:t>
+            </a:r>
+            <a:r>
+              <a:rPr lang="en-US" dirty="0"/>
+              <a:t>)</a:t>
+            </a:r>
+          </a:p>
+        </p:txBody>
+      </p:sp>
+      <p:sp>
+        <p:nvSpPr>
+          <p:cNvPr id="3" name="Date Placeholder 2">
+            <a:extLst>
+              <a:ext uri="{FF2B5EF4-FFF2-40B4-BE49-F238E27FC236}">
+                <a16:creationId xmlns:a16="http://schemas.microsoft.com/office/drawing/2014/main" id="{1D82DCE1-12E6-3A7C-EC29-E1ECB4AEE149}"/>
+              </a:ext>
+            </a:extLst>
+          </p:cNvPr>
+          <p:cNvSpPr>
+            <a:spLocks noGrp="1"/>
+          </p:cNvSpPr>
+          <p:nvPr>
+            <p:ph type="dt" sz="half" idx="10"/>
+          </p:nvPr>
+        </p:nvSpPr>
+        <p:spPr/>
+        <p:txBody>
+          <a:bodyPr/>
+          <a:lstStyle/>
+          <a:p>
+            <a:r>
+              <a:rPr lang="en-US"/>
+              <a:t>15/01/2026</a:t>
+            </a:r>
+          </a:p>
+        </p:txBody>
+      </p:sp>
+      <p:sp>
+        <p:nvSpPr>
+          <p:cNvPr id="4" name="Footer Placeholder 3">
+            <a:extLst>
+              <a:ext uri="{FF2B5EF4-FFF2-40B4-BE49-F238E27FC236}">
+                <a16:creationId xmlns:a16="http://schemas.microsoft.com/office/drawing/2014/main" id="{77946DF4-B6C4-6DE7-EBD2-D725012220EE}"/>
+              </a:ext>
+            </a:extLst>
+          </p:cNvPr>
+          <p:cNvSpPr>
+            <a:spLocks noGrp="1"/>
+          </p:cNvSpPr>
+          <p:nvPr>
+            <p:ph type="ftr" sz="quarter" idx="11"/>
+          </p:nvPr>
+        </p:nvSpPr>
+        <p:spPr/>
+        <p:txBody>
+          <a:bodyPr/>
+          <a:lstStyle/>
+          <a:p>
+            <a:r>
+              <a:rPr lang="en-US"/>
+              <a:t>Stefan Cristi Zugravel, elettronica base, TPS lezione 2</a:t>
+            </a:r>
+          </a:p>
+        </p:txBody>
+      </p:sp>
+      <p:sp>
+        <p:nvSpPr>
+          <p:cNvPr id="5" name="Slide Number Placeholder 4">
+            <a:extLst>
+              <a:ext uri="{FF2B5EF4-FFF2-40B4-BE49-F238E27FC236}">
+                <a16:creationId xmlns:a16="http://schemas.microsoft.com/office/drawing/2014/main" id="{D260E47D-90CF-A7E2-7F18-A6A1F4817CEA}"/>
+              </a:ext>
+            </a:extLst>
+          </p:cNvPr>
+          <p:cNvSpPr>
+            <a:spLocks noGrp="1"/>
+          </p:cNvSpPr>
+          <p:nvPr>
+            <p:ph type="sldNum" sz="quarter" idx="12"/>
+          </p:nvPr>
+        </p:nvSpPr>
+        <p:spPr/>
+        <p:txBody>
+          <a:bodyPr/>
+          <a:lstStyle/>
+          <a:p>
+            <a:fld id="{B7C12E76-5DE4-834B-BE10-AD31AA7B20EC}" type="slidenum">
+              <a:rPr lang="en-US" smtClean="0"/>
+              <a:t>9</a:t>
+            </a:fld>
+            <a:endParaRPr lang="en-US"/>
+          </a:p>
+        </p:txBody>
+      </p:sp>
+      <p:pic>
+        <p:nvPicPr>
+          <p:cNvPr id="6" name="Picture 5">
+            <a:extLst>
+              <a:ext uri="{FF2B5EF4-FFF2-40B4-BE49-F238E27FC236}">
+                <a16:creationId xmlns:a16="http://schemas.microsoft.com/office/drawing/2014/main" id="{4BC68D81-ECA3-DBF4-D254-ACF744999FEE}"/>
+              </a:ext>
+            </a:extLst>
+          </p:cNvPr>
+          <p:cNvPicPr>
+            <a:picLocks noChangeAspect="1"/>
+          </p:cNvPicPr>
+          <p:nvPr/>
+        </p:nvPicPr>
+        <p:blipFill>
+          <a:blip r:embed="rId2"/>
+          <a:stretch>
+            <a:fillRect/>
+          </a:stretch>
+        </p:blipFill>
+        <p:spPr>
+          <a:xfrm>
+            <a:off x="596898" y="2715994"/>
+            <a:ext cx="3695700" cy="2641600"/>
+          </a:xfrm>
+          <a:prstGeom prst="rect">
+            <a:avLst/>
+          </a:prstGeom>
+        </p:spPr>
+      </p:pic>
+      <p:pic>
+        <p:nvPicPr>
+          <p:cNvPr id="7" name="Picture 6">
+            <a:extLst>
+              <a:ext uri="{FF2B5EF4-FFF2-40B4-BE49-F238E27FC236}">
+                <a16:creationId xmlns:a16="http://schemas.microsoft.com/office/drawing/2014/main" id="{ABF95196-AFAD-F5F1-F35C-52746A807F44}"/>
+              </a:ext>
+            </a:extLst>
+          </p:cNvPr>
+          <p:cNvPicPr>
+            <a:picLocks noChangeAspect="1"/>
+          </p:cNvPicPr>
+          <p:nvPr/>
+        </p:nvPicPr>
+        <p:blipFill>
+          <a:blip r:embed="rId3"/>
+          <a:stretch>
+            <a:fillRect/>
+          </a:stretch>
+        </p:blipFill>
+        <p:spPr>
+          <a:xfrm>
+            <a:off x="5218273" y="1189816"/>
+            <a:ext cx="5870254" cy="4538756"/>
+          </a:xfrm>
+          <a:prstGeom prst="rect">
+            <a:avLst/>
+          </a:prstGeom>
+        </p:spPr>
+      </p:pic>
+      <p:sp>
+        <p:nvSpPr>
+          <p:cNvPr id="9" name="TextBox 8">
+            <a:extLst>
+              <a:ext uri="{FF2B5EF4-FFF2-40B4-BE49-F238E27FC236}">
+                <a16:creationId xmlns:a16="http://schemas.microsoft.com/office/drawing/2014/main" id="{27659330-59C7-B673-FC46-1414B126A510}"/>
+              </a:ext>
+            </a:extLst>
+          </p:cNvPr>
+          <p:cNvSpPr txBox="1"/>
+          <p:nvPr/>
+        </p:nvSpPr>
+        <p:spPr>
+          <a:xfrm>
+            <a:off x="3693459" y="2191435"/>
+            <a:ext cx="2608730" cy="369332"/>
+          </a:xfrm>
+          <a:prstGeom prst="rect">
+            <a:avLst/>
+          </a:prstGeom>
+          <a:noFill/>
+        </p:spPr>
+        <p:txBody>
+          <a:bodyPr wrap="square">
+            <a:spAutoFit/>
+          </a:bodyPr>
+          <a:lstStyle/>
+          <a:p>
+            <a:pPr>
+              <a:buNone/>
+            </a:pPr>
+            <a:r>
+              <a:rPr lang="en-US" dirty="0">
+                <a:solidFill>
+                  <a:srgbClr val="FF0000"/>
+                </a:solidFill>
+                <a:effectLst/>
+              </a:rPr>
+              <a:t>This is all you</a:t>
+            </a:r>
+            <a:r>
+              <a:rPr lang="en-US" dirty="0">
+                <a:solidFill>
+                  <a:srgbClr val="FF0000"/>
+                </a:solidFill>
+              </a:rPr>
+              <a:t> </a:t>
+            </a:r>
+            <a:r>
+              <a:rPr lang="en-US" dirty="0">
+                <a:solidFill>
+                  <a:srgbClr val="FF0000"/>
+                </a:solidFill>
+                <a:effectLst/>
+              </a:rPr>
+              <a:t>really need</a:t>
+            </a:r>
+          </a:p>
+        </p:txBody>
+      </p:sp>
+      <p:cxnSp>
+        <p:nvCxnSpPr>
+          <p:cNvPr id="11" name="Straight Arrow Connector 10">
+            <a:extLst>
+              <a:ext uri="{FF2B5EF4-FFF2-40B4-BE49-F238E27FC236}">
+                <a16:creationId xmlns:a16="http://schemas.microsoft.com/office/drawing/2014/main" id="{9551FF49-E49E-2494-C10E-3D39C44A0768}"/>
+              </a:ext>
+            </a:extLst>
+          </p:cNvPr>
+          <p:cNvCxnSpPr>
+            <a:cxnSpLocks/>
+            <a:stCxn id="9" idx="3"/>
+          </p:cNvCxnSpPr>
+          <p:nvPr/>
+        </p:nvCxnSpPr>
+        <p:spPr>
+          <a:xfrm>
+            <a:off x="6302189" y="2376101"/>
+            <a:ext cx="1586753" cy="0"/>
+          </a:xfrm>
+          <a:prstGeom prst="straightConnector1">
+            <a:avLst/>
+          </a:prstGeom>
+          <a:ln w="57150">
+            <a:solidFill>
+              <a:srgbClr val="FF0000"/>
+            </a:solidFill>
+            <a:tailEnd type="triangle"/>
+          </a:ln>
+        </p:spPr>
+        <p:style>
+          <a:lnRef idx="2">
+            <a:schemeClr val="accent1"/>
+          </a:lnRef>
+          <a:fillRef idx="0">
+            <a:schemeClr val="accent1"/>
+          </a:fillRef>
+          <a:effectRef idx="1">
+            <a:schemeClr val="accent1"/>
+          </a:effectRef>
+          <a:fontRef idx="minor">
+            <a:schemeClr val="tx1"/>
+          </a:fontRef>
+        </p:style>
+      </p:cxnSp>
+    </p:spTree>
+    <p:extLst>
+      <p:ext uri="{BB962C8B-B14F-4D97-AF65-F5344CB8AC3E}">
+        <p14:creationId xmlns:p14="http://schemas.microsoft.com/office/powerpoint/2010/main" val="3227419992"/>
       </p:ext>
     </p:extLst>
   </p:cSld>
